--- a/Mapped Curriculum Lessons/Grade 6/Lesson 03 - Decimal Numbers/Decimal Numbers - Slides.pptx
+++ b/Mapped Curriculum Lessons/Grade 6/Lesson 03 - Decimal Numbers/Decimal Numbers - Slides.pptx
@@ -2,28 +2,28 @@
 <file path=ppt/presentation.xml><?xml version="1.0" encoding="utf-8"?>
 <p:presentation xmlns:p="http://schemas.openxmlformats.org/presentationml/2006/main" embedTrueTypeFonts="1" saveSubsetFonts="0">
   <p:sldMasterIdLst>
-    <p:sldMasterId xmlns:r="http://schemas.openxmlformats.org/officeDocument/2006/relationships" id="2147483648" r:id="Ra8c8c9ad023c45be"/>
+    <p:sldMasterId xmlns:r="http://schemas.openxmlformats.org/officeDocument/2006/relationships" id="2147483648" r:id="R344d4d1681014710"/>
   </p:sldMasterIdLst>
   <p:notesMasterIdLst>
-    <p:notesMasterId xmlns:r="http://schemas.openxmlformats.org/officeDocument/2006/relationships" r:id="Rcc5a64d3d7ac492a"/>
+    <p:notesMasterId xmlns:r="http://schemas.openxmlformats.org/officeDocument/2006/relationships" r:id="R12d11a66ae544ac5"/>
   </p:notesMasterIdLst>
   <p:sldIdLst>
-    <p:sldId xmlns:r="http://schemas.openxmlformats.org/officeDocument/2006/relationships" id="256" r:id="R9ce3d8fab0f14f9e"/>
-    <p:sldId xmlns:r="http://schemas.openxmlformats.org/officeDocument/2006/relationships" id="257" r:id="R177d1fc4b59d458c"/>
-    <p:sldId xmlns:r="http://schemas.openxmlformats.org/officeDocument/2006/relationships" id="258" r:id="R10c3d982af37462e"/>
-    <p:sldId xmlns:r="http://schemas.openxmlformats.org/officeDocument/2006/relationships" id="259" r:id="R40390dba50064dfc"/>
-    <p:sldId xmlns:r="http://schemas.openxmlformats.org/officeDocument/2006/relationships" id="260" r:id="R5815314707384d5a"/>
-    <p:sldId xmlns:r="http://schemas.openxmlformats.org/officeDocument/2006/relationships" id="261" r:id="R6a6aaab16f8243f1"/>
-    <p:sldId xmlns:r="http://schemas.openxmlformats.org/officeDocument/2006/relationships" id="262" r:id="R4431be1ea8044c6d"/>
-    <p:sldId xmlns:r="http://schemas.openxmlformats.org/officeDocument/2006/relationships" id="263" r:id="Ra05fd2f86d264bee"/>
-    <p:sldId xmlns:r="http://schemas.openxmlformats.org/officeDocument/2006/relationships" id="264" r:id="R4884a0e0f7bc4132"/>
+    <p:sldId xmlns:r="http://schemas.openxmlformats.org/officeDocument/2006/relationships" id="256" r:id="R73761d21ad4b4378"/>
+    <p:sldId xmlns:r="http://schemas.openxmlformats.org/officeDocument/2006/relationships" id="257" r:id="Rdbfc1c5ee94f4c95"/>
+    <p:sldId xmlns:r="http://schemas.openxmlformats.org/officeDocument/2006/relationships" id="258" r:id="R7eafcaed8e294268"/>
+    <p:sldId xmlns:r="http://schemas.openxmlformats.org/officeDocument/2006/relationships" id="259" r:id="R40cf4f007f8441a3"/>
+    <p:sldId xmlns:r="http://schemas.openxmlformats.org/officeDocument/2006/relationships" id="260" r:id="R3b5af29df3aa41ba"/>
+    <p:sldId xmlns:r="http://schemas.openxmlformats.org/officeDocument/2006/relationships" id="261" r:id="Rfc10b5320d2a48f6"/>
+    <p:sldId xmlns:r="http://schemas.openxmlformats.org/officeDocument/2006/relationships" id="262" r:id="Refdedaffbfc743fd"/>
+    <p:sldId xmlns:r="http://schemas.openxmlformats.org/officeDocument/2006/relationships" id="263" r:id="Rf47fb48f6e1b4aa7"/>
+    <p:sldId xmlns:r="http://schemas.openxmlformats.org/officeDocument/2006/relationships" id="264" r:id="Rd35dbd39bf2a42ea"/>
   </p:sldIdLst>
   <p:sldSz cx="12192000" cy="6858000"/>
   <p:notesSz cx="6858000" cy="9144000"/>
   <p:embeddedFontLst>
     <p:embeddedFont>
       <p:font typeface="JetBrains Mono"/>
-      <p:regular xmlns:r="http://schemas.openxmlformats.org/officeDocument/2006/relationships" r:id="R8d01d02b2f0f41c8"/>
+      <p:regular xmlns:r="http://schemas.openxmlformats.org/officeDocument/2006/relationships" r:id="R1e48d2a5fbeb45cd"/>
     </p:embeddedFont>
   </p:embeddedFontLst>
 </p:presentation>
@@ -1071,7 +1071,7 @@
           <p:nvPr/>
         </p:nvPicPr>
         <p:blipFill rotWithShape="1">
-          <a:blip xmlns:r="http://schemas.openxmlformats.org/officeDocument/2006/relationships" xmlns:a="http://schemas.openxmlformats.org/drawingml/2006/main" r:embed="Rc05c54e4d2fb4f29"/>
+          <a:blip xmlns:r="http://schemas.openxmlformats.org/officeDocument/2006/relationships" xmlns:a="http://schemas.openxmlformats.org/drawingml/2006/main" r:embed="Rfa5322633290432d"/>
           <a:stretch xmlns:a="http://schemas.openxmlformats.org/drawingml/2006/main"/>
         </p:blipFill>
         <p:spPr>
@@ -1451,7 +1451,7 @@
           <p:nvPr/>
         </p:nvPicPr>
         <p:blipFill rotWithShape="1">
-          <a:blip xmlns:r="http://schemas.openxmlformats.org/officeDocument/2006/relationships" xmlns:a="http://schemas.openxmlformats.org/drawingml/2006/main" r:embed="Rd6f2bd1bd3b04fba">
+          <a:blip xmlns:r="http://schemas.openxmlformats.org/officeDocument/2006/relationships" xmlns:a="http://schemas.openxmlformats.org/drawingml/2006/main" r:embed="R90acb620044b4816">
             <a:alphaModFix amt="28000"/>
           </a:blip>
           <a:stretch xmlns:a="http://schemas.openxmlformats.org/drawingml/2006/main"/>
@@ -1664,7 +1664,7 @@
           <p:nvPr/>
         </p:nvPicPr>
         <p:blipFill rotWithShape="1">
-          <a:blip xmlns:r="http://schemas.openxmlformats.org/officeDocument/2006/relationships" xmlns:a="http://schemas.openxmlformats.org/drawingml/2006/main" r:embed="R76c6b054c26f4bd7">
+          <a:blip xmlns:r="http://schemas.openxmlformats.org/officeDocument/2006/relationships" xmlns:a="http://schemas.openxmlformats.org/drawingml/2006/main" r:embed="Rf2ad63d57ad04858">
             <a:alphaModFix amt="28000"/>
           </a:blip>
           <a:stretch xmlns:a="http://schemas.openxmlformats.org/drawingml/2006/main"/>
@@ -1899,7 +1899,7 @@
           <p:nvPr/>
         </p:nvPicPr>
         <p:blipFill rotWithShape="1">
-          <a:blip xmlns:r="http://schemas.openxmlformats.org/officeDocument/2006/relationships" xmlns:a="http://schemas.openxmlformats.org/drawingml/2006/main" r:embed="R47023dc0a18342a4">
+          <a:blip xmlns:r="http://schemas.openxmlformats.org/officeDocument/2006/relationships" xmlns:a="http://schemas.openxmlformats.org/drawingml/2006/main" r:embed="R2f8b9d6d72044dc3">
             <a:alphaModFix amt="28000"/>
           </a:blip>
           <a:stretch xmlns:a="http://schemas.openxmlformats.org/drawingml/2006/main"/>
@@ -2176,7 +2176,7 @@
           <p:nvPr/>
         </p:nvPicPr>
         <p:blipFill rotWithShape="1">
-          <a:blip xmlns:r="http://schemas.openxmlformats.org/officeDocument/2006/relationships" xmlns:a="http://schemas.openxmlformats.org/drawingml/2006/main" r:embed="R4fe70674b19843ab">
+          <a:blip xmlns:r="http://schemas.openxmlformats.org/officeDocument/2006/relationships" xmlns:a="http://schemas.openxmlformats.org/drawingml/2006/main" r:embed="R299b6a6624cd4a36">
             <a:alphaModFix amt="28000"/>
           </a:blip>
           <a:stretch xmlns:a="http://schemas.openxmlformats.org/drawingml/2006/main"/>
@@ -2451,7 +2451,7 @@
           <p:nvPr/>
         </p:nvPicPr>
         <p:blipFill rotWithShape="1">
-          <a:blip xmlns:r="http://schemas.openxmlformats.org/officeDocument/2006/relationships" xmlns:a="http://schemas.openxmlformats.org/drawingml/2006/main" r:embed="R78316c7b3c26412d">
+          <a:blip xmlns:r="http://schemas.openxmlformats.org/officeDocument/2006/relationships" xmlns:a="http://schemas.openxmlformats.org/drawingml/2006/main" r:embed="R9005f2fc392e43b8">
             <a:alphaModFix amt="28000"/>
           </a:blip>
           <a:stretch xmlns:a="http://schemas.openxmlformats.org/drawingml/2006/main"/>
@@ -2875,7 +2875,7 @@
           <p:nvPr/>
         </p:nvPicPr>
         <p:blipFill rotWithShape="1">
-          <a:blip xmlns:r="http://schemas.openxmlformats.org/officeDocument/2006/relationships" xmlns:a="http://schemas.openxmlformats.org/drawingml/2006/main" r:embed="R4fabc701c84248cd">
+          <a:blip xmlns:r="http://schemas.openxmlformats.org/officeDocument/2006/relationships" xmlns:a="http://schemas.openxmlformats.org/drawingml/2006/main" r:embed="Rf5866d0dbaac45ef">
             <a:alphaModFix amt="28000"/>
           </a:blip>
           <a:stretch xmlns:a="http://schemas.openxmlformats.org/drawingml/2006/main"/>
@@ -3016,7 +3016,7 @@
           <p:nvPr/>
         </p:nvPicPr>
         <p:blipFill rotWithShape="1">
-          <a:blip xmlns:r="http://schemas.openxmlformats.org/officeDocument/2006/relationships" xmlns:a="http://schemas.openxmlformats.org/drawingml/2006/main" r:embed="R9b41122eab024f8f">
+          <a:blip xmlns:r="http://schemas.openxmlformats.org/officeDocument/2006/relationships" xmlns:a="http://schemas.openxmlformats.org/drawingml/2006/main" r:embed="R1d006b4efb524038">
             <a:alphaModFix amt="28000"/>
           </a:blip>
           <a:stretch xmlns:a="http://schemas.openxmlformats.org/drawingml/2006/main"/>
@@ -3130,7 +3130,7 @@
           <p:nvPr/>
         </p:nvPicPr>
         <p:blipFill rotWithShape="1">
-          <a:blip xmlns:r="http://schemas.openxmlformats.org/officeDocument/2006/relationships" xmlns:a="http://schemas.openxmlformats.org/drawingml/2006/main" r:embed="Rf40f525a20f44aed">
+          <a:blip xmlns:r="http://schemas.openxmlformats.org/officeDocument/2006/relationships" xmlns:a="http://schemas.openxmlformats.org/drawingml/2006/main" r:embed="R04c07560193247f3">
             <a:alphaModFix amt="28000"/>
           </a:blip>
           <a:stretch xmlns:a="http://schemas.openxmlformats.org/drawingml/2006/main"/>
@@ -3457,7 +3457,7 @@
           <p:nvPr/>
         </p:nvPicPr>
         <p:blipFill rotWithShape="1">
-          <a:blip xmlns:r="http://schemas.openxmlformats.org/officeDocument/2006/relationships" xmlns:a="http://schemas.openxmlformats.org/drawingml/2006/main" r:embed="Ra46066c0058d43e2">
+          <a:blip xmlns:r="http://schemas.openxmlformats.org/officeDocument/2006/relationships" xmlns:a="http://schemas.openxmlformats.org/drawingml/2006/main" r:embed="Rff41a5eb6d834194">
             <a:alphaModFix amt="28000"/>
           </a:blip>
           <a:stretch xmlns:a="http://schemas.openxmlformats.org/drawingml/2006/main"/>
@@ -3745,7 +3745,7 @@
           <p:nvPr/>
         </p:nvPicPr>
         <p:blipFill rotWithShape="1">
-          <a:blip xmlns:r="http://schemas.openxmlformats.org/officeDocument/2006/relationships" xmlns:a="http://schemas.openxmlformats.org/drawingml/2006/main" r:embed="Rda02797f50e74561">
+          <a:blip xmlns:r="http://schemas.openxmlformats.org/officeDocument/2006/relationships" xmlns:a="http://schemas.openxmlformats.org/drawingml/2006/main" r:embed="R9ca248ba3bee4a72">
             <a:alphaModFix amt="28000"/>
           </a:blip>
           <a:stretch xmlns:a="http://schemas.openxmlformats.org/drawingml/2006/main"/>
@@ -3982,17 +3982,17 @@
   </p:cSld>
   <p:clrMap bg1="lt1" tx1="dk1" bg2="lt2" tx2="dk2" accent1="accent1" accent2="accent2" accent3="accent3" accent4="accent4" accent5="accent5" accent6="accent6" hlink="hlink" folHlink="folHlink"/>
   <p:sldLayoutIdLst>
-    <p:sldLayoutId xmlns:r="http://schemas.openxmlformats.org/officeDocument/2006/relationships" id="2147483649" r:id="Rd8c9b72a450e430e"/>
-    <p:sldLayoutId xmlns:r="http://schemas.openxmlformats.org/officeDocument/2006/relationships" id="2147483650" r:id="Re58f45329bdc4dbd"/>
-    <p:sldLayoutId xmlns:r="http://schemas.openxmlformats.org/officeDocument/2006/relationships" id="2147483651" r:id="R8876130c7a99457e"/>
-    <p:sldLayoutId xmlns:r="http://schemas.openxmlformats.org/officeDocument/2006/relationships" id="2147483652" r:id="R7750fba7859245bf"/>
-    <p:sldLayoutId xmlns:r="http://schemas.openxmlformats.org/officeDocument/2006/relationships" id="2147483653" r:id="R5d885ad47a3e4817"/>
-    <p:sldLayoutId xmlns:r="http://schemas.openxmlformats.org/officeDocument/2006/relationships" id="2147483654" r:id="Rbbc533f8b04e4385"/>
-    <p:sldLayoutId xmlns:r="http://schemas.openxmlformats.org/officeDocument/2006/relationships" id="2147483655" r:id="Rf5ab797ee4664904"/>
-    <p:sldLayoutId xmlns:r="http://schemas.openxmlformats.org/officeDocument/2006/relationships" id="2147483656" r:id="Rc0056759b9694806"/>
-    <p:sldLayoutId xmlns:r="http://schemas.openxmlformats.org/officeDocument/2006/relationships" id="2147483657" r:id="R8e15fb59cb8a4f98"/>
-    <p:sldLayoutId xmlns:r="http://schemas.openxmlformats.org/officeDocument/2006/relationships" id="2147483658" r:id="R04a06dc880a34020"/>
-    <p:sldLayoutId xmlns:r="http://schemas.openxmlformats.org/officeDocument/2006/relationships" id="2147483659" r:id="R3f22af24e095430b"/>
+    <p:sldLayoutId xmlns:r="http://schemas.openxmlformats.org/officeDocument/2006/relationships" id="2147483649" r:id="Ra9be3c11e65d4445"/>
+    <p:sldLayoutId xmlns:r="http://schemas.openxmlformats.org/officeDocument/2006/relationships" id="2147483650" r:id="R697b8f6acf554ed1"/>
+    <p:sldLayoutId xmlns:r="http://schemas.openxmlformats.org/officeDocument/2006/relationships" id="2147483651" r:id="R3cef6f6a847f4491"/>
+    <p:sldLayoutId xmlns:r="http://schemas.openxmlformats.org/officeDocument/2006/relationships" id="2147483652" r:id="R9bd8cc9dc4a64b9f"/>
+    <p:sldLayoutId xmlns:r="http://schemas.openxmlformats.org/officeDocument/2006/relationships" id="2147483653" r:id="R735f2f2a1dfb4c3e"/>
+    <p:sldLayoutId xmlns:r="http://schemas.openxmlformats.org/officeDocument/2006/relationships" id="2147483654" r:id="Rc034d55fdfaf4a46"/>
+    <p:sldLayoutId xmlns:r="http://schemas.openxmlformats.org/officeDocument/2006/relationships" id="2147483655" r:id="R6b4377b58535488b"/>
+    <p:sldLayoutId xmlns:r="http://schemas.openxmlformats.org/officeDocument/2006/relationships" id="2147483656" r:id="Rc1827df015234590"/>
+    <p:sldLayoutId xmlns:r="http://schemas.openxmlformats.org/officeDocument/2006/relationships" id="2147483657" r:id="R2f1acea134fa4752"/>
+    <p:sldLayoutId xmlns:r="http://schemas.openxmlformats.org/officeDocument/2006/relationships" id="2147483658" r:id="R82a1e540e64543e4"/>
+    <p:sldLayoutId xmlns:r="http://schemas.openxmlformats.org/officeDocument/2006/relationships" id="2147483659" r:id="Re5f00fa5a2ee4e0b"/>
   </p:sldLayoutIdLst>
   <p:hf hdr="0" ftr="0" dt="0"/>
   <p:txStyles>

--- a/Mapped Curriculum Lessons/Grade 6/Lesson 03 - Decimal Numbers/Decimal Numbers - Slides.pptx
+++ b/Mapped Curriculum Lessons/Grade 6/Lesson 03 - Decimal Numbers/Decimal Numbers - Slides.pptx
@@ -2,28 +2,28 @@
 <file path=ppt/presentation.xml><?xml version="1.0" encoding="utf-8"?>
 <p:presentation xmlns:p="http://schemas.openxmlformats.org/presentationml/2006/main" embedTrueTypeFonts="1" saveSubsetFonts="0">
   <p:sldMasterIdLst>
-    <p:sldMasterId xmlns:r="http://schemas.openxmlformats.org/officeDocument/2006/relationships" id="2147483648" r:id="R344d4d1681014710"/>
+    <p:sldMasterId xmlns:r="http://schemas.openxmlformats.org/officeDocument/2006/relationships" id="2147483648" r:id="R77630a266d294f45"/>
   </p:sldMasterIdLst>
   <p:notesMasterIdLst>
-    <p:notesMasterId xmlns:r="http://schemas.openxmlformats.org/officeDocument/2006/relationships" r:id="R12d11a66ae544ac5"/>
+    <p:notesMasterId xmlns:r="http://schemas.openxmlformats.org/officeDocument/2006/relationships" r:id="Rc847555ab705469d"/>
   </p:notesMasterIdLst>
   <p:sldIdLst>
-    <p:sldId xmlns:r="http://schemas.openxmlformats.org/officeDocument/2006/relationships" id="256" r:id="R73761d21ad4b4378"/>
-    <p:sldId xmlns:r="http://schemas.openxmlformats.org/officeDocument/2006/relationships" id="257" r:id="Rdbfc1c5ee94f4c95"/>
-    <p:sldId xmlns:r="http://schemas.openxmlformats.org/officeDocument/2006/relationships" id="258" r:id="R7eafcaed8e294268"/>
-    <p:sldId xmlns:r="http://schemas.openxmlformats.org/officeDocument/2006/relationships" id="259" r:id="R40cf4f007f8441a3"/>
-    <p:sldId xmlns:r="http://schemas.openxmlformats.org/officeDocument/2006/relationships" id="260" r:id="R3b5af29df3aa41ba"/>
-    <p:sldId xmlns:r="http://schemas.openxmlformats.org/officeDocument/2006/relationships" id="261" r:id="Rfc10b5320d2a48f6"/>
-    <p:sldId xmlns:r="http://schemas.openxmlformats.org/officeDocument/2006/relationships" id="262" r:id="Refdedaffbfc743fd"/>
-    <p:sldId xmlns:r="http://schemas.openxmlformats.org/officeDocument/2006/relationships" id="263" r:id="Rf47fb48f6e1b4aa7"/>
-    <p:sldId xmlns:r="http://schemas.openxmlformats.org/officeDocument/2006/relationships" id="264" r:id="Rd35dbd39bf2a42ea"/>
+    <p:sldId xmlns:r="http://schemas.openxmlformats.org/officeDocument/2006/relationships" id="256" r:id="R8d0c764173ce4e3d"/>
+    <p:sldId xmlns:r="http://schemas.openxmlformats.org/officeDocument/2006/relationships" id="257" r:id="R831abd5df6ca48f3"/>
+    <p:sldId xmlns:r="http://schemas.openxmlformats.org/officeDocument/2006/relationships" id="258" r:id="Rab826d525e734354"/>
+    <p:sldId xmlns:r="http://schemas.openxmlformats.org/officeDocument/2006/relationships" id="259" r:id="Rb735d406e4a6407e"/>
+    <p:sldId xmlns:r="http://schemas.openxmlformats.org/officeDocument/2006/relationships" id="260" r:id="R35903ce2aef54393"/>
+    <p:sldId xmlns:r="http://schemas.openxmlformats.org/officeDocument/2006/relationships" id="261" r:id="Rbf6c6e2ae7f24153"/>
+    <p:sldId xmlns:r="http://schemas.openxmlformats.org/officeDocument/2006/relationships" id="262" r:id="Re1e8d91f477e4364"/>
+    <p:sldId xmlns:r="http://schemas.openxmlformats.org/officeDocument/2006/relationships" id="263" r:id="R95e8edb576524396"/>
+    <p:sldId xmlns:r="http://schemas.openxmlformats.org/officeDocument/2006/relationships" id="264" r:id="R28edf8fa6f63412a"/>
   </p:sldIdLst>
   <p:sldSz cx="12192000" cy="6858000"/>
   <p:notesSz cx="6858000" cy="9144000"/>
   <p:embeddedFontLst>
     <p:embeddedFont>
       <p:font typeface="JetBrains Mono"/>
-      <p:regular xmlns:r="http://schemas.openxmlformats.org/officeDocument/2006/relationships" r:id="R1e48d2a5fbeb45cd"/>
+      <p:regular xmlns:r="http://schemas.openxmlformats.org/officeDocument/2006/relationships" r:id="R2b1227f87a2b4408"/>
     </p:embeddedFont>
   </p:embeddedFontLst>
 </p:presentation>
@@ -1071,7 +1071,7 @@
           <p:nvPr/>
         </p:nvPicPr>
         <p:blipFill rotWithShape="1">
-          <a:blip xmlns:r="http://schemas.openxmlformats.org/officeDocument/2006/relationships" xmlns:a="http://schemas.openxmlformats.org/drawingml/2006/main" r:embed="Rfa5322633290432d"/>
+          <a:blip xmlns:r="http://schemas.openxmlformats.org/officeDocument/2006/relationships" xmlns:a="http://schemas.openxmlformats.org/drawingml/2006/main" r:embed="R7dabe1694e6d4046"/>
           <a:stretch xmlns:a="http://schemas.openxmlformats.org/drawingml/2006/main"/>
         </p:blipFill>
         <p:spPr>
@@ -1451,7 +1451,7 @@
           <p:nvPr/>
         </p:nvPicPr>
         <p:blipFill rotWithShape="1">
-          <a:blip xmlns:r="http://schemas.openxmlformats.org/officeDocument/2006/relationships" xmlns:a="http://schemas.openxmlformats.org/drawingml/2006/main" r:embed="R90acb620044b4816">
+          <a:blip xmlns:r="http://schemas.openxmlformats.org/officeDocument/2006/relationships" xmlns:a="http://schemas.openxmlformats.org/drawingml/2006/main" r:embed="Rb85b420fafa84ad4">
             <a:alphaModFix amt="28000"/>
           </a:blip>
           <a:stretch xmlns:a="http://schemas.openxmlformats.org/drawingml/2006/main"/>
@@ -1664,7 +1664,7 @@
           <p:nvPr/>
         </p:nvPicPr>
         <p:blipFill rotWithShape="1">
-          <a:blip xmlns:r="http://schemas.openxmlformats.org/officeDocument/2006/relationships" xmlns:a="http://schemas.openxmlformats.org/drawingml/2006/main" r:embed="Rf2ad63d57ad04858">
+          <a:blip xmlns:r="http://schemas.openxmlformats.org/officeDocument/2006/relationships" xmlns:a="http://schemas.openxmlformats.org/drawingml/2006/main" r:embed="R838850c598654447">
             <a:alphaModFix amt="28000"/>
           </a:blip>
           <a:stretch xmlns:a="http://schemas.openxmlformats.org/drawingml/2006/main"/>
@@ -1899,7 +1899,7 @@
           <p:nvPr/>
         </p:nvPicPr>
         <p:blipFill rotWithShape="1">
-          <a:blip xmlns:r="http://schemas.openxmlformats.org/officeDocument/2006/relationships" xmlns:a="http://schemas.openxmlformats.org/drawingml/2006/main" r:embed="R2f8b9d6d72044dc3">
+          <a:blip xmlns:r="http://schemas.openxmlformats.org/officeDocument/2006/relationships" xmlns:a="http://schemas.openxmlformats.org/drawingml/2006/main" r:embed="R97c40179bb9a4bb5">
             <a:alphaModFix amt="28000"/>
           </a:blip>
           <a:stretch xmlns:a="http://schemas.openxmlformats.org/drawingml/2006/main"/>
@@ -2176,7 +2176,7 @@
           <p:nvPr/>
         </p:nvPicPr>
         <p:blipFill rotWithShape="1">
-          <a:blip xmlns:r="http://schemas.openxmlformats.org/officeDocument/2006/relationships" xmlns:a="http://schemas.openxmlformats.org/drawingml/2006/main" r:embed="R299b6a6624cd4a36">
+          <a:blip xmlns:r="http://schemas.openxmlformats.org/officeDocument/2006/relationships" xmlns:a="http://schemas.openxmlformats.org/drawingml/2006/main" r:embed="Rcf3fecd9bffd4dc2">
             <a:alphaModFix amt="28000"/>
           </a:blip>
           <a:stretch xmlns:a="http://schemas.openxmlformats.org/drawingml/2006/main"/>
@@ -2451,7 +2451,7 @@
           <p:nvPr/>
         </p:nvPicPr>
         <p:blipFill rotWithShape="1">
-          <a:blip xmlns:r="http://schemas.openxmlformats.org/officeDocument/2006/relationships" xmlns:a="http://schemas.openxmlformats.org/drawingml/2006/main" r:embed="R9005f2fc392e43b8">
+          <a:blip xmlns:r="http://schemas.openxmlformats.org/officeDocument/2006/relationships" xmlns:a="http://schemas.openxmlformats.org/drawingml/2006/main" r:embed="R8fc77e3485604c97">
             <a:alphaModFix amt="28000"/>
           </a:blip>
           <a:stretch xmlns:a="http://schemas.openxmlformats.org/drawingml/2006/main"/>
@@ -2875,7 +2875,7 @@
           <p:nvPr/>
         </p:nvPicPr>
         <p:blipFill rotWithShape="1">
-          <a:blip xmlns:r="http://schemas.openxmlformats.org/officeDocument/2006/relationships" xmlns:a="http://schemas.openxmlformats.org/drawingml/2006/main" r:embed="Rf5866d0dbaac45ef">
+          <a:blip xmlns:r="http://schemas.openxmlformats.org/officeDocument/2006/relationships" xmlns:a="http://schemas.openxmlformats.org/drawingml/2006/main" r:embed="R0721f0351b33454a">
             <a:alphaModFix amt="28000"/>
           </a:blip>
           <a:stretch xmlns:a="http://schemas.openxmlformats.org/drawingml/2006/main"/>
@@ -3016,7 +3016,7 @@
           <p:nvPr/>
         </p:nvPicPr>
         <p:blipFill rotWithShape="1">
-          <a:blip xmlns:r="http://schemas.openxmlformats.org/officeDocument/2006/relationships" xmlns:a="http://schemas.openxmlformats.org/drawingml/2006/main" r:embed="R1d006b4efb524038">
+          <a:blip xmlns:r="http://schemas.openxmlformats.org/officeDocument/2006/relationships" xmlns:a="http://schemas.openxmlformats.org/drawingml/2006/main" r:embed="Rd828a3e2dacb407c">
             <a:alphaModFix amt="28000"/>
           </a:blip>
           <a:stretch xmlns:a="http://schemas.openxmlformats.org/drawingml/2006/main"/>
@@ -3130,7 +3130,7 @@
           <p:nvPr/>
         </p:nvPicPr>
         <p:blipFill rotWithShape="1">
-          <a:blip xmlns:r="http://schemas.openxmlformats.org/officeDocument/2006/relationships" xmlns:a="http://schemas.openxmlformats.org/drawingml/2006/main" r:embed="R04c07560193247f3">
+          <a:blip xmlns:r="http://schemas.openxmlformats.org/officeDocument/2006/relationships" xmlns:a="http://schemas.openxmlformats.org/drawingml/2006/main" r:embed="Rdc318bc85a0c445a">
             <a:alphaModFix amt="28000"/>
           </a:blip>
           <a:stretch xmlns:a="http://schemas.openxmlformats.org/drawingml/2006/main"/>
@@ -3457,7 +3457,7 @@
           <p:nvPr/>
         </p:nvPicPr>
         <p:blipFill rotWithShape="1">
-          <a:blip xmlns:r="http://schemas.openxmlformats.org/officeDocument/2006/relationships" xmlns:a="http://schemas.openxmlformats.org/drawingml/2006/main" r:embed="Rff41a5eb6d834194">
+          <a:blip xmlns:r="http://schemas.openxmlformats.org/officeDocument/2006/relationships" xmlns:a="http://schemas.openxmlformats.org/drawingml/2006/main" r:embed="R037ea4833d4a457d">
             <a:alphaModFix amt="28000"/>
           </a:blip>
           <a:stretch xmlns:a="http://schemas.openxmlformats.org/drawingml/2006/main"/>
@@ -3745,7 +3745,7 @@
           <p:nvPr/>
         </p:nvPicPr>
         <p:blipFill rotWithShape="1">
-          <a:blip xmlns:r="http://schemas.openxmlformats.org/officeDocument/2006/relationships" xmlns:a="http://schemas.openxmlformats.org/drawingml/2006/main" r:embed="R9ca248ba3bee4a72">
+          <a:blip xmlns:r="http://schemas.openxmlformats.org/officeDocument/2006/relationships" xmlns:a="http://schemas.openxmlformats.org/drawingml/2006/main" r:embed="R8edea625c117466f">
             <a:alphaModFix amt="28000"/>
           </a:blip>
           <a:stretch xmlns:a="http://schemas.openxmlformats.org/drawingml/2006/main"/>
@@ -3982,17 +3982,17 @@
   </p:cSld>
   <p:clrMap bg1="lt1" tx1="dk1" bg2="lt2" tx2="dk2" accent1="accent1" accent2="accent2" accent3="accent3" accent4="accent4" accent5="accent5" accent6="accent6" hlink="hlink" folHlink="folHlink"/>
   <p:sldLayoutIdLst>
-    <p:sldLayoutId xmlns:r="http://schemas.openxmlformats.org/officeDocument/2006/relationships" id="2147483649" r:id="Ra9be3c11e65d4445"/>
-    <p:sldLayoutId xmlns:r="http://schemas.openxmlformats.org/officeDocument/2006/relationships" id="2147483650" r:id="R697b8f6acf554ed1"/>
-    <p:sldLayoutId xmlns:r="http://schemas.openxmlformats.org/officeDocument/2006/relationships" id="2147483651" r:id="R3cef6f6a847f4491"/>
-    <p:sldLayoutId xmlns:r="http://schemas.openxmlformats.org/officeDocument/2006/relationships" id="2147483652" r:id="R9bd8cc9dc4a64b9f"/>
-    <p:sldLayoutId xmlns:r="http://schemas.openxmlformats.org/officeDocument/2006/relationships" id="2147483653" r:id="R735f2f2a1dfb4c3e"/>
-    <p:sldLayoutId xmlns:r="http://schemas.openxmlformats.org/officeDocument/2006/relationships" id="2147483654" r:id="Rc034d55fdfaf4a46"/>
-    <p:sldLayoutId xmlns:r="http://schemas.openxmlformats.org/officeDocument/2006/relationships" id="2147483655" r:id="R6b4377b58535488b"/>
-    <p:sldLayoutId xmlns:r="http://schemas.openxmlformats.org/officeDocument/2006/relationships" id="2147483656" r:id="Rc1827df015234590"/>
-    <p:sldLayoutId xmlns:r="http://schemas.openxmlformats.org/officeDocument/2006/relationships" id="2147483657" r:id="R2f1acea134fa4752"/>
-    <p:sldLayoutId xmlns:r="http://schemas.openxmlformats.org/officeDocument/2006/relationships" id="2147483658" r:id="R82a1e540e64543e4"/>
-    <p:sldLayoutId xmlns:r="http://schemas.openxmlformats.org/officeDocument/2006/relationships" id="2147483659" r:id="Re5f00fa5a2ee4e0b"/>
+    <p:sldLayoutId xmlns:r="http://schemas.openxmlformats.org/officeDocument/2006/relationships" id="2147483649" r:id="R02bab9026bab486a"/>
+    <p:sldLayoutId xmlns:r="http://schemas.openxmlformats.org/officeDocument/2006/relationships" id="2147483650" r:id="R52473a933f3f4b43"/>
+    <p:sldLayoutId xmlns:r="http://schemas.openxmlformats.org/officeDocument/2006/relationships" id="2147483651" r:id="Rf15987a3d31f46a5"/>
+    <p:sldLayoutId xmlns:r="http://schemas.openxmlformats.org/officeDocument/2006/relationships" id="2147483652" r:id="R3991fb40616648ff"/>
+    <p:sldLayoutId xmlns:r="http://schemas.openxmlformats.org/officeDocument/2006/relationships" id="2147483653" r:id="R1692baa068834127"/>
+    <p:sldLayoutId xmlns:r="http://schemas.openxmlformats.org/officeDocument/2006/relationships" id="2147483654" r:id="R279b81a07a4143f3"/>
+    <p:sldLayoutId xmlns:r="http://schemas.openxmlformats.org/officeDocument/2006/relationships" id="2147483655" r:id="Rafbaa7ed5d484021"/>
+    <p:sldLayoutId xmlns:r="http://schemas.openxmlformats.org/officeDocument/2006/relationships" id="2147483656" r:id="R2364104bc491486a"/>
+    <p:sldLayoutId xmlns:r="http://schemas.openxmlformats.org/officeDocument/2006/relationships" id="2147483657" r:id="Rba1f8b25f2d84bf5"/>
+    <p:sldLayoutId xmlns:r="http://schemas.openxmlformats.org/officeDocument/2006/relationships" id="2147483658" r:id="R668b04db2b054be3"/>
+    <p:sldLayoutId xmlns:r="http://schemas.openxmlformats.org/officeDocument/2006/relationships" id="2147483659" r:id="Rfc2d18aa8c05451f"/>
   </p:sldLayoutIdLst>
   <p:hf hdr="0" ftr="0" dt="0"/>
   <p:txStyles>
@@ -7416,7 +7416,7 @@
         </p:spPr>
         <p:txBody>
           <a:bodyPr xmlns:a="http://schemas.openxmlformats.org/drawingml/2006/main">
-            <a:normAutofit fontScale="100000"/>
+            <a:normAutofit fontScale="96505"/>
           </a:bodyPr>
           <a:lstStyle xmlns:a="http://schemas.openxmlformats.org/drawingml/2006/main"/>
           <a:p xmlns:a="http://schemas.openxmlformats.org/drawingml/2006/main">
@@ -7435,7 +7435,51 @@
                 <a:ea typeface="Calibri"/>
                 <a:cs typeface="Calibri"/>
               </a:rPr>
-              <a:t>Add a third decimal input called rest_minutes. Display total_minutes as travel minutes plus rest minutes. For 12.5 and 2.5, the total must be 15.0.</a:t>
+              <a:t>Ask for the number of rest minutes and store it in [rest_minutes]. Add [travel_minutes] and [rest_minutes], then store the result in [total_minutes]. Display </a:t>
+            </a:r>
+            <a:r>
+              <a:rPr sz="2400" b="0">
+                <a:solidFill>
+                  <a:srgbClr val="067D17"/>
+                </a:solidFill>
+                <a:latin typeface="JetBrains Mono"/>
+                <a:ea typeface="JetBrains Mono"/>
+                <a:cs typeface="JetBrains Mono"/>
+              </a:rPr>
+              <a:t>"Total minutes:"</a:t>
+            </a:r>
+            <a:r>
+              <a:rPr sz="2400" b="0">
+                <a:solidFill>
+                  <a:srgbClr val="080808"/>
+                </a:solidFill>
+                <a:latin typeface="Calibri"/>
+                <a:ea typeface="Calibri"/>
+                <a:cs typeface="Calibri"/>
+              </a:rPr>
+              <a:t> followed by [total_minutes]. Test 10 kilometres, 12.5 travel minutes and 2.5 rest minutes; the output must include </a:t>
+            </a:r>
+            <a:r>
+              <a:rPr sz="2400" b="0">
+                <a:solidFill>
+                  <a:srgbClr val="067D17"/>
+                </a:solidFill>
+                <a:latin typeface="JetBrains Mono"/>
+                <a:ea typeface="JetBrains Mono"/>
+                <a:cs typeface="JetBrains Mono"/>
+              </a:rPr>
+              <a:t>"Total minutes: 15.0"</a:t>
+            </a:r>
+            <a:r>
+              <a:rPr sz="2400" b="0">
+                <a:solidFill>
+                  <a:srgbClr val="080808"/>
+                </a:solidFill>
+                <a:latin typeface="Calibri"/>
+                <a:ea typeface="Calibri"/>
+                <a:cs typeface="Calibri"/>
+              </a:rPr>
+              <a:t>.</a:t>
             </a:r>
           </a:p>
         </p:txBody>

--- a/Mapped Curriculum Lessons/Grade 6/Lesson 03 - Decimal Numbers/Decimal Numbers - Slides.pptx
+++ b/Mapped Curriculum Lessons/Grade 6/Lesson 03 - Decimal Numbers/Decimal Numbers - Slides.pptx
@@ -2,28 +2,28 @@
 <file path=ppt/presentation.xml><?xml version="1.0" encoding="utf-8"?>
 <p:presentation xmlns:p="http://schemas.openxmlformats.org/presentationml/2006/main" embedTrueTypeFonts="1" saveSubsetFonts="0">
   <p:sldMasterIdLst>
-    <p:sldMasterId xmlns:r="http://schemas.openxmlformats.org/officeDocument/2006/relationships" id="2147483648" r:id="R77630a266d294f45"/>
+    <p:sldMasterId xmlns:r="http://schemas.openxmlformats.org/officeDocument/2006/relationships" id="2147483648" r:id="Rb486752f7bcb4106"/>
   </p:sldMasterIdLst>
   <p:notesMasterIdLst>
-    <p:notesMasterId xmlns:r="http://schemas.openxmlformats.org/officeDocument/2006/relationships" r:id="Rc847555ab705469d"/>
+    <p:notesMasterId xmlns:r="http://schemas.openxmlformats.org/officeDocument/2006/relationships" r:id="Re0d08dcf6c95463d"/>
   </p:notesMasterIdLst>
   <p:sldIdLst>
-    <p:sldId xmlns:r="http://schemas.openxmlformats.org/officeDocument/2006/relationships" id="256" r:id="R8d0c764173ce4e3d"/>
-    <p:sldId xmlns:r="http://schemas.openxmlformats.org/officeDocument/2006/relationships" id="257" r:id="R831abd5df6ca48f3"/>
-    <p:sldId xmlns:r="http://schemas.openxmlformats.org/officeDocument/2006/relationships" id="258" r:id="Rab826d525e734354"/>
-    <p:sldId xmlns:r="http://schemas.openxmlformats.org/officeDocument/2006/relationships" id="259" r:id="Rb735d406e4a6407e"/>
-    <p:sldId xmlns:r="http://schemas.openxmlformats.org/officeDocument/2006/relationships" id="260" r:id="R35903ce2aef54393"/>
-    <p:sldId xmlns:r="http://schemas.openxmlformats.org/officeDocument/2006/relationships" id="261" r:id="Rbf6c6e2ae7f24153"/>
-    <p:sldId xmlns:r="http://schemas.openxmlformats.org/officeDocument/2006/relationships" id="262" r:id="Re1e8d91f477e4364"/>
-    <p:sldId xmlns:r="http://schemas.openxmlformats.org/officeDocument/2006/relationships" id="263" r:id="R95e8edb576524396"/>
-    <p:sldId xmlns:r="http://schemas.openxmlformats.org/officeDocument/2006/relationships" id="264" r:id="R28edf8fa6f63412a"/>
+    <p:sldId xmlns:r="http://schemas.openxmlformats.org/officeDocument/2006/relationships" id="256" r:id="R67e72add5bcd48fd"/>
+    <p:sldId xmlns:r="http://schemas.openxmlformats.org/officeDocument/2006/relationships" id="257" r:id="R5af7eac0644d4433"/>
+    <p:sldId xmlns:r="http://schemas.openxmlformats.org/officeDocument/2006/relationships" id="258" r:id="R5fc04564d61d4d56"/>
+    <p:sldId xmlns:r="http://schemas.openxmlformats.org/officeDocument/2006/relationships" id="259" r:id="R613dd8e17dad4cdd"/>
+    <p:sldId xmlns:r="http://schemas.openxmlformats.org/officeDocument/2006/relationships" id="260" r:id="Rf0c6f763c8a240ed"/>
+    <p:sldId xmlns:r="http://schemas.openxmlformats.org/officeDocument/2006/relationships" id="261" r:id="R84fe368e0e2943e5"/>
+    <p:sldId xmlns:r="http://schemas.openxmlformats.org/officeDocument/2006/relationships" id="262" r:id="R0bc63b82ee6042f2"/>
+    <p:sldId xmlns:r="http://schemas.openxmlformats.org/officeDocument/2006/relationships" id="263" r:id="Re65ff085f6e64916"/>
+    <p:sldId xmlns:r="http://schemas.openxmlformats.org/officeDocument/2006/relationships" id="264" r:id="R8bf5f7571dd84aea"/>
   </p:sldIdLst>
   <p:sldSz cx="12192000" cy="6858000"/>
   <p:notesSz cx="6858000" cy="9144000"/>
   <p:embeddedFontLst>
     <p:embeddedFont>
       <p:font typeface="JetBrains Mono"/>
-      <p:regular xmlns:r="http://schemas.openxmlformats.org/officeDocument/2006/relationships" r:id="R2b1227f87a2b4408"/>
+      <p:regular xmlns:r="http://schemas.openxmlformats.org/officeDocument/2006/relationships" r:id="R108e8f1f3f614093"/>
     </p:embeddedFont>
   </p:embeddedFontLst>
 </p:presentation>
@@ -1071,7 +1071,7 @@
           <p:nvPr/>
         </p:nvPicPr>
         <p:blipFill rotWithShape="1">
-          <a:blip xmlns:r="http://schemas.openxmlformats.org/officeDocument/2006/relationships" xmlns:a="http://schemas.openxmlformats.org/drawingml/2006/main" r:embed="R7dabe1694e6d4046"/>
+          <a:blip xmlns:r="http://schemas.openxmlformats.org/officeDocument/2006/relationships" xmlns:a="http://schemas.openxmlformats.org/drawingml/2006/main" r:embed="R539d2dd408b14132"/>
           <a:stretch xmlns:a="http://schemas.openxmlformats.org/drawingml/2006/main"/>
         </p:blipFill>
         <p:spPr>
@@ -1451,7 +1451,7 @@
           <p:nvPr/>
         </p:nvPicPr>
         <p:blipFill rotWithShape="1">
-          <a:blip xmlns:r="http://schemas.openxmlformats.org/officeDocument/2006/relationships" xmlns:a="http://schemas.openxmlformats.org/drawingml/2006/main" r:embed="Rb85b420fafa84ad4">
+          <a:blip xmlns:r="http://schemas.openxmlformats.org/officeDocument/2006/relationships" xmlns:a="http://schemas.openxmlformats.org/drawingml/2006/main" r:embed="Rde22622517224c19">
             <a:alphaModFix amt="28000"/>
           </a:blip>
           <a:stretch xmlns:a="http://schemas.openxmlformats.org/drawingml/2006/main"/>
@@ -1664,7 +1664,7 @@
           <p:nvPr/>
         </p:nvPicPr>
         <p:blipFill rotWithShape="1">
-          <a:blip xmlns:r="http://schemas.openxmlformats.org/officeDocument/2006/relationships" xmlns:a="http://schemas.openxmlformats.org/drawingml/2006/main" r:embed="R838850c598654447">
+          <a:blip xmlns:r="http://schemas.openxmlformats.org/officeDocument/2006/relationships" xmlns:a="http://schemas.openxmlformats.org/drawingml/2006/main" r:embed="R8c85e5b5c3c247b3">
             <a:alphaModFix amt="28000"/>
           </a:blip>
           <a:stretch xmlns:a="http://schemas.openxmlformats.org/drawingml/2006/main"/>
@@ -1899,7 +1899,7 @@
           <p:nvPr/>
         </p:nvPicPr>
         <p:blipFill rotWithShape="1">
-          <a:blip xmlns:r="http://schemas.openxmlformats.org/officeDocument/2006/relationships" xmlns:a="http://schemas.openxmlformats.org/drawingml/2006/main" r:embed="R97c40179bb9a4bb5">
+          <a:blip xmlns:r="http://schemas.openxmlformats.org/officeDocument/2006/relationships" xmlns:a="http://schemas.openxmlformats.org/drawingml/2006/main" r:embed="Rb2b42788c82a44d0">
             <a:alphaModFix amt="28000"/>
           </a:blip>
           <a:stretch xmlns:a="http://schemas.openxmlformats.org/drawingml/2006/main"/>
@@ -2176,7 +2176,7 @@
           <p:nvPr/>
         </p:nvPicPr>
         <p:blipFill rotWithShape="1">
-          <a:blip xmlns:r="http://schemas.openxmlformats.org/officeDocument/2006/relationships" xmlns:a="http://schemas.openxmlformats.org/drawingml/2006/main" r:embed="Rcf3fecd9bffd4dc2">
+          <a:blip xmlns:r="http://schemas.openxmlformats.org/officeDocument/2006/relationships" xmlns:a="http://schemas.openxmlformats.org/drawingml/2006/main" r:embed="Rfa6e985cfc30467b">
             <a:alphaModFix amt="28000"/>
           </a:blip>
           <a:stretch xmlns:a="http://schemas.openxmlformats.org/drawingml/2006/main"/>
@@ -2451,7 +2451,7 @@
           <p:nvPr/>
         </p:nvPicPr>
         <p:blipFill rotWithShape="1">
-          <a:blip xmlns:r="http://schemas.openxmlformats.org/officeDocument/2006/relationships" xmlns:a="http://schemas.openxmlformats.org/drawingml/2006/main" r:embed="R8fc77e3485604c97">
+          <a:blip xmlns:r="http://schemas.openxmlformats.org/officeDocument/2006/relationships" xmlns:a="http://schemas.openxmlformats.org/drawingml/2006/main" r:embed="R9f266a3d670b4df9">
             <a:alphaModFix amt="28000"/>
           </a:blip>
           <a:stretch xmlns:a="http://schemas.openxmlformats.org/drawingml/2006/main"/>
@@ -2875,7 +2875,7 @@
           <p:nvPr/>
         </p:nvPicPr>
         <p:blipFill rotWithShape="1">
-          <a:blip xmlns:r="http://schemas.openxmlformats.org/officeDocument/2006/relationships" xmlns:a="http://schemas.openxmlformats.org/drawingml/2006/main" r:embed="R0721f0351b33454a">
+          <a:blip xmlns:r="http://schemas.openxmlformats.org/officeDocument/2006/relationships" xmlns:a="http://schemas.openxmlformats.org/drawingml/2006/main" r:embed="R94e4f4264ea849ff">
             <a:alphaModFix amt="28000"/>
           </a:blip>
           <a:stretch xmlns:a="http://schemas.openxmlformats.org/drawingml/2006/main"/>
@@ -3016,7 +3016,7 @@
           <p:nvPr/>
         </p:nvPicPr>
         <p:blipFill rotWithShape="1">
-          <a:blip xmlns:r="http://schemas.openxmlformats.org/officeDocument/2006/relationships" xmlns:a="http://schemas.openxmlformats.org/drawingml/2006/main" r:embed="Rd828a3e2dacb407c">
+          <a:blip xmlns:r="http://schemas.openxmlformats.org/officeDocument/2006/relationships" xmlns:a="http://schemas.openxmlformats.org/drawingml/2006/main" r:embed="Rf6eed12047cc4b90">
             <a:alphaModFix amt="28000"/>
           </a:blip>
           <a:stretch xmlns:a="http://schemas.openxmlformats.org/drawingml/2006/main"/>
@@ -3130,7 +3130,7 @@
           <p:nvPr/>
         </p:nvPicPr>
         <p:blipFill rotWithShape="1">
-          <a:blip xmlns:r="http://schemas.openxmlformats.org/officeDocument/2006/relationships" xmlns:a="http://schemas.openxmlformats.org/drawingml/2006/main" r:embed="Rdc318bc85a0c445a">
+          <a:blip xmlns:r="http://schemas.openxmlformats.org/officeDocument/2006/relationships" xmlns:a="http://schemas.openxmlformats.org/drawingml/2006/main" r:embed="R6337270ccb234c86">
             <a:alphaModFix amt="28000"/>
           </a:blip>
           <a:stretch xmlns:a="http://schemas.openxmlformats.org/drawingml/2006/main"/>
@@ -3457,7 +3457,7 @@
           <p:nvPr/>
         </p:nvPicPr>
         <p:blipFill rotWithShape="1">
-          <a:blip xmlns:r="http://schemas.openxmlformats.org/officeDocument/2006/relationships" xmlns:a="http://schemas.openxmlformats.org/drawingml/2006/main" r:embed="R037ea4833d4a457d">
+          <a:blip xmlns:r="http://schemas.openxmlformats.org/officeDocument/2006/relationships" xmlns:a="http://schemas.openxmlformats.org/drawingml/2006/main" r:embed="R0c5b41d71f3a4ca1">
             <a:alphaModFix amt="28000"/>
           </a:blip>
           <a:stretch xmlns:a="http://schemas.openxmlformats.org/drawingml/2006/main"/>
@@ -3745,7 +3745,7 @@
           <p:nvPr/>
         </p:nvPicPr>
         <p:blipFill rotWithShape="1">
-          <a:blip xmlns:r="http://schemas.openxmlformats.org/officeDocument/2006/relationships" xmlns:a="http://schemas.openxmlformats.org/drawingml/2006/main" r:embed="R8edea625c117466f">
+          <a:blip xmlns:r="http://schemas.openxmlformats.org/officeDocument/2006/relationships" xmlns:a="http://schemas.openxmlformats.org/drawingml/2006/main" r:embed="R0ce09abd8da848cd">
             <a:alphaModFix amt="28000"/>
           </a:blip>
           <a:stretch xmlns:a="http://schemas.openxmlformats.org/drawingml/2006/main"/>
@@ -3982,17 +3982,17 @@
   </p:cSld>
   <p:clrMap bg1="lt1" tx1="dk1" bg2="lt2" tx2="dk2" accent1="accent1" accent2="accent2" accent3="accent3" accent4="accent4" accent5="accent5" accent6="accent6" hlink="hlink" folHlink="folHlink"/>
   <p:sldLayoutIdLst>
-    <p:sldLayoutId xmlns:r="http://schemas.openxmlformats.org/officeDocument/2006/relationships" id="2147483649" r:id="R02bab9026bab486a"/>
-    <p:sldLayoutId xmlns:r="http://schemas.openxmlformats.org/officeDocument/2006/relationships" id="2147483650" r:id="R52473a933f3f4b43"/>
-    <p:sldLayoutId xmlns:r="http://schemas.openxmlformats.org/officeDocument/2006/relationships" id="2147483651" r:id="Rf15987a3d31f46a5"/>
-    <p:sldLayoutId xmlns:r="http://schemas.openxmlformats.org/officeDocument/2006/relationships" id="2147483652" r:id="R3991fb40616648ff"/>
-    <p:sldLayoutId xmlns:r="http://schemas.openxmlformats.org/officeDocument/2006/relationships" id="2147483653" r:id="R1692baa068834127"/>
-    <p:sldLayoutId xmlns:r="http://schemas.openxmlformats.org/officeDocument/2006/relationships" id="2147483654" r:id="R279b81a07a4143f3"/>
-    <p:sldLayoutId xmlns:r="http://schemas.openxmlformats.org/officeDocument/2006/relationships" id="2147483655" r:id="Rafbaa7ed5d484021"/>
-    <p:sldLayoutId xmlns:r="http://schemas.openxmlformats.org/officeDocument/2006/relationships" id="2147483656" r:id="R2364104bc491486a"/>
-    <p:sldLayoutId xmlns:r="http://schemas.openxmlformats.org/officeDocument/2006/relationships" id="2147483657" r:id="Rba1f8b25f2d84bf5"/>
-    <p:sldLayoutId xmlns:r="http://schemas.openxmlformats.org/officeDocument/2006/relationships" id="2147483658" r:id="R668b04db2b054be3"/>
-    <p:sldLayoutId xmlns:r="http://schemas.openxmlformats.org/officeDocument/2006/relationships" id="2147483659" r:id="Rfc2d18aa8c05451f"/>
+    <p:sldLayoutId xmlns:r="http://schemas.openxmlformats.org/officeDocument/2006/relationships" id="2147483649" r:id="R7c2319bca4574c44"/>
+    <p:sldLayoutId xmlns:r="http://schemas.openxmlformats.org/officeDocument/2006/relationships" id="2147483650" r:id="R66f41322f4ee4dcc"/>
+    <p:sldLayoutId xmlns:r="http://schemas.openxmlformats.org/officeDocument/2006/relationships" id="2147483651" r:id="R90e03895028c4cf6"/>
+    <p:sldLayoutId xmlns:r="http://schemas.openxmlformats.org/officeDocument/2006/relationships" id="2147483652" r:id="Re9e22dbcc41240bb"/>
+    <p:sldLayoutId xmlns:r="http://schemas.openxmlformats.org/officeDocument/2006/relationships" id="2147483653" r:id="Rb16b82c5edae4acc"/>
+    <p:sldLayoutId xmlns:r="http://schemas.openxmlformats.org/officeDocument/2006/relationships" id="2147483654" r:id="R12b00bc297834e4e"/>
+    <p:sldLayoutId xmlns:r="http://schemas.openxmlformats.org/officeDocument/2006/relationships" id="2147483655" r:id="Rdb908a6f0c7441a5"/>
+    <p:sldLayoutId xmlns:r="http://schemas.openxmlformats.org/officeDocument/2006/relationships" id="2147483656" r:id="Rb5a5edda219b420c"/>
+    <p:sldLayoutId xmlns:r="http://schemas.openxmlformats.org/officeDocument/2006/relationships" id="2147483657" r:id="R004279089fc14b84"/>
+    <p:sldLayoutId xmlns:r="http://schemas.openxmlformats.org/officeDocument/2006/relationships" id="2147483658" r:id="R36f2c8b793c546d3"/>
+    <p:sldLayoutId xmlns:r="http://schemas.openxmlformats.org/officeDocument/2006/relationships" id="2147483659" r:id="R998edf74d95b48c8"/>
   </p:sldLayoutIdLst>
   <p:hf hdr="0" ftr="0" dt="0"/>
   <p:txStyles>
@@ -6865,7 +6865,101 @@
                 <a:ea typeface="Calibri"/>
                 <a:cs typeface="Calibri"/>
               </a:rPr>
-              <a:t>Store [distance] / 2 in a variable called [halfway_distance]. Display [halfway_distance] before [speed]. Test 9 kilometres and 3 minutes; the halfway distance should be 4.5.</a:t>
+              <a:t>Change the example so it also divides </a:t>
+            </a:r>
+            <a:r>
+              <a:rPr sz="2050" b="0">
+                <a:solidFill>
+                  <a:srgbClr val="6A1B9A"/>
+                </a:solidFill>
+                <a:highlight>
+                  <a:srgbClr val="ECEAF4"/>
+                </a:highlight>
+                <a:latin typeface="JetBrains Mono"/>
+                <a:ea typeface="JetBrains Mono"/>
+                <a:cs typeface="JetBrains Mono"/>
+              </a:rPr>
+              <a:t> distance </a:t>
+            </a:r>
+            <a:r>
+              <a:rPr sz="2400" b="0">
+                <a:solidFill>
+                  <a:srgbClr val="080808"/>
+                </a:solidFill>
+                <a:latin typeface="Calibri"/>
+                <a:ea typeface="Calibri"/>
+                <a:cs typeface="Calibri"/>
+              </a:rPr>
+              <a:t> by 2 and stores the result in </a:t>
+            </a:r>
+            <a:r>
+              <a:rPr sz="2050" b="0">
+                <a:solidFill>
+                  <a:srgbClr val="6A1B9A"/>
+                </a:solidFill>
+                <a:highlight>
+                  <a:srgbClr val="ECEAF4"/>
+                </a:highlight>
+                <a:latin typeface="JetBrains Mono"/>
+                <a:ea typeface="JetBrains Mono"/>
+                <a:cs typeface="JetBrains Mono"/>
+              </a:rPr>
+              <a:t> halfway_distance </a:t>
+            </a:r>
+            <a:r>
+              <a:rPr sz="2400" b="0">
+                <a:solidFill>
+                  <a:srgbClr val="080808"/>
+                </a:solidFill>
+                <a:latin typeface="Calibri"/>
+                <a:ea typeface="Calibri"/>
+                <a:cs typeface="Calibri"/>
+              </a:rPr>
+              <a:t>. Display </a:t>
+            </a:r>
+            <a:r>
+              <a:rPr sz="2050" b="0">
+                <a:solidFill>
+                  <a:srgbClr val="067D17"/>
+                </a:solidFill>
+                <a:latin typeface="JetBrains Mono"/>
+                <a:ea typeface="JetBrains Mono"/>
+                <a:cs typeface="JetBrains Mono"/>
+              </a:rPr>
+              <a:t>"Halfway distance:"</a:t>
+            </a:r>
+            <a:r>
+              <a:rPr sz="2400" b="0">
+                <a:solidFill>
+                  <a:srgbClr val="080808"/>
+                </a:solidFill>
+                <a:latin typeface="Calibri"/>
+                <a:ea typeface="Calibri"/>
+                <a:cs typeface="Calibri"/>
+              </a:rPr>
+              <a:t> followed by this value before the speed. For example, 9 and 3 display </a:t>
+            </a:r>
+            <a:r>
+              <a:rPr sz="2050" b="0">
+                <a:solidFill>
+                  <a:srgbClr val="067D17"/>
+                </a:solidFill>
+                <a:latin typeface="JetBrains Mono"/>
+                <a:ea typeface="JetBrains Mono"/>
+                <a:cs typeface="JetBrains Mono"/>
+              </a:rPr>
+              <a:t>"Halfway distance: 4.5"</a:t>
+            </a:r>
+            <a:r>
+              <a:rPr sz="2400" b="0">
+                <a:solidFill>
+                  <a:srgbClr val="080808"/>
+                </a:solidFill>
+                <a:latin typeface="Calibri"/>
+                <a:ea typeface="Calibri"/>
+                <a:cs typeface="Calibri"/>
+              </a:rPr>
+              <a:t>.</a:t>
             </a:r>
           </a:p>
         </p:txBody>
@@ -7416,7 +7510,7 @@
         </p:spPr>
         <p:txBody>
           <a:bodyPr xmlns:a="http://schemas.openxmlformats.org/drawingml/2006/main">
-            <a:normAutofit fontScale="96505"/>
+            <a:normAutofit fontScale="100000"/>
           </a:bodyPr>
           <a:lstStyle xmlns:a="http://schemas.openxmlformats.org/drawingml/2006/main"/>
           <a:p xmlns:a="http://schemas.openxmlformats.org/drawingml/2006/main">
@@ -7435,18 +7529,18 @@
                 <a:ea typeface="Calibri"/>
                 <a:cs typeface="Calibri"/>
               </a:rPr>
-              <a:t>Ask for the number of rest minutes and store it in [rest_minutes]. Add [travel_minutes] and [rest_minutes], then store the result in [total_minutes]. Display </a:t>
-            </a:r>
-            <a:r>
-              <a:rPr sz="2400" b="0">
-                <a:solidFill>
-                  <a:srgbClr val="067D17"/>
-                </a:solidFill>
-                <a:latin typeface="JetBrains Mono"/>
-                <a:ea typeface="JetBrains Mono"/>
-                <a:cs typeface="JetBrains Mono"/>
-              </a:rPr>
-              <a:t>"Total minutes:"</a:t>
+              <a:t>Extend the example so it asks for rest minutes, converts the answer with </a:t>
+            </a:r>
+            <a:r>
+              <a:rPr sz="2050" b="0">
+                <a:solidFill>
+                  <a:srgbClr val="1750EB"/>
+                </a:solidFill>
+                <a:latin typeface="JetBrains Mono"/>
+                <a:ea typeface="JetBrains Mono"/>
+                <a:cs typeface="JetBrains Mono"/>
+              </a:rPr>
+              <a:t>float()</a:t>
             </a:r>
             <a:r>
               <a:rPr sz="2400" b="0">
@@ -7457,10 +7551,107 @@
                 <a:ea typeface="Calibri"/>
                 <a:cs typeface="Calibri"/>
               </a:rPr>
-              <a:t> followed by [total_minutes]. Test 10 kilometres, 12.5 travel minutes and 2.5 rest minutes; the output must include </a:t>
+              <a:t> and stores it in </a:t>
+            </a:r>
+            <a:r>
+              <a:rPr sz="2050" b="0">
+                <a:solidFill>
+                  <a:srgbClr val="6A1B9A"/>
+                </a:solidFill>
+                <a:highlight>
+                  <a:srgbClr val="ECEAF4"/>
+                </a:highlight>
+                <a:latin typeface="JetBrains Mono"/>
+                <a:ea typeface="JetBrains Mono"/>
+                <a:cs typeface="JetBrains Mono"/>
+              </a:rPr>
+              <a:t> rest_minutes </a:t>
             </a:r>
             <a:r>
               <a:rPr sz="2400" b="0">
+                <a:solidFill>
+                  <a:srgbClr val="080808"/>
+                </a:solidFill>
+                <a:latin typeface="Calibri"/>
+                <a:ea typeface="Calibri"/>
+                <a:cs typeface="Calibri"/>
+              </a:rPr>
+              <a:t>. Add </a:t>
+            </a:r>
+            <a:r>
+              <a:rPr sz="2050" b="0">
+                <a:solidFill>
+                  <a:srgbClr val="6A1B9A"/>
+                </a:solidFill>
+                <a:highlight>
+                  <a:srgbClr val="ECEAF4"/>
+                </a:highlight>
+                <a:latin typeface="JetBrains Mono"/>
+                <a:ea typeface="JetBrains Mono"/>
+                <a:cs typeface="JetBrains Mono"/>
+              </a:rPr>
+              <a:t> travel_minutes </a:t>
+            </a:r>
+            <a:r>
+              <a:rPr sz="2400" b="0">
+                <a:solidFill>
+                  <a:srgbClr val="080808"/>
+                </a:solidFill>
+                <a:latin typeface="Calibri"/>
+                <a:ea typeface="Calibri"/>
+                <a:cs typeface="Calibri"/>
+              </a:rPr>
+              <a:t> and </a:t>
+            </a:r>
+            <a:r>
+              <a:rPr sz="2050" b="0">
+                <a:solidFill>
+                  <a:srgbClr val="6A1B9A"/>
+                </a:solidFill>
+                <a:highlight>
+                  <a:srgbClr val="ECEAF4"/>
+                </a:highlight>
+                <a:latin typeface="JetBrains Mono"/>
+                <a:ea typeface="JetBrains Mono"/>
+                <a:cs typeface="JetBrains Mono"/>
+              </a:rPr>
+              <a:t> rest_minutes </a:t>
+            </a:r>
+            <a:r>
+              <a:rPr sz="2400" b="0">
+                <a:solidFill>
+                  <a:srgbClr val="080808"/>
+                </a:solidFill>
+                <a:latin typeface="Calibri"/>
+                <a:ea typeface="Calibri"/>
+                <a:cs typeface="Calibri"/>
+              </a:rPr>
+              <a:t> and display </a:t>
+            </a:r>
+            <a:r>
+              <a:rPr sz="2050" b="0">
+                <a:solidFill>
+                  <a:srgbClr val="067D17"/>
+                </a:solidFill>
+                <a:latin typeface="JetBrains Mono"/>
+                <a:ea typeface="JetBrains Mono"/>
+                <a:cs typeface="JetBrains Mono"/>
+              </a:rPr>
+              <a:t>"Total minutes:"</a:t>
+            </a:r>
+            <a:r>
+              <a:rPr sz="2400" b="0">
+                <a:solidFill>
+                  <a:srgbClr val="080808"/>
+                </a:solidFill>
+                <a:latin typeface="Calibri"/>
+                <a:ea typeface="Calibri"/>
+                <a:cs typeface="Calibri"/>
+              </a:rPr>
+              <a:t> followed by the result. For example, 10, 12.5 and 2.5 display </a:t>
+            </a:r>
+            <a:r>
+              <a:rPr sz="2050" b="0">
                 <a:solidFill>
                   <a:srgbClr val="067D17"/>
                 </a:solidFill>
@@ -8049,7 +8240,117 @@
                 <a:ea typeface="Calibri"/>
                 <a:cs typeface="Calibri"/>
               </a:rPr>
-              <a:t>Create a floor-area calculator. Ask for decimal length and width, multiply them, and display a labelled area. Test 4.5 by 2: the area should be 9.0.</a:t>
+              <a:t>Create a carpet calculator. Ask for a room's length, width and the carpet price per square metre, converting each answer with </a:t>
+            </a:r>
+            <a:r>
+              <a:rPr sz="2050" b="0">
+                <a:solidFill>
+                  <a:srgbClr val="1750EB"/>
+                </a:solidFill>
+                <a:latin typeface="JetBrains Mono"/>
+                <a:ea typeface="JetBrains Mono"/>
+                <a:cs typeface="JetBrains Mono"/>
+              </a:rPr>
+              <a:t>float()</a:t>
+            </a:r>
+            <a:r>
+              <a:rPr sz="2400" b="0">
+                <a:solidFill>
+                  <a:srgbClr val="080808"/>
+                </a:solidFill>
+                <a:latin typeface="Calibri"/>
+                <a:ea typeface="Calibri"/>
+                <a:cs typeface="Calibri"/>
+              </a:rPr>
+              <a:t>. Display </a:t>
+            </a:r>
+            <a:r>
+              <a:rPr sz="2050" b="0">
+                <a:solidFill>
+                  <a:srgbClr val="067D17"/>
+                </a:solidFill>
+                <a:latin typeface="JetBrains Mono"/>
+                <a:ea typeface="JetBrains Mono"/>
+                <a:cs typeface="JetBrains Mono"/>
+              </a:rPr>
+              <a:t>"Floor area:"</a:t>
+            </a:r>
+            <a:r>
+              <a:rPr sz="2400" b="0">
+                <a:solidFill>
+                  <a:srgbClr val="080808"/>
+                </a:solidFill>
+                <a:latin typeface="Calibri"/>
+                <a:ea typeface="Calibri"/>
+                <a:cs typeface="Calibri"/>
+              </a:rPr>
+              <a:t> and </a:t>
+            </a:r>
+            <a:r>
+              <a:rPr sz="2050" b="0">
+                <a:solidFill>
+                  <a:srgbClr val="067D17"/>
+                </a:solidFill>
+                <a:latin typeface="JetBrains Mono"/>
+                <a:ea typeface="JetBrains Mono"/>
+                <a:cs typeface="JetBrains Mono"/>
+              </a:rPr>
+              <a:t>"Carpet cost:"</a:t>
+            </a:r>
+            <a:r>
+              <a:rPr sz="2400" b="0">
+                <a:solidFill>
+                  <a:srgbClr val="080808"/>
+                </a:solidFill>
+                <a:latin typeface="Calibri"/>
+                <a:ea typeface="Calibri"/>
+                <a:cs typeface="Calibri"/>
+              </a:rPr>
+              <a:t> with the results. For example, 4.5, 2 and 10.5 display </a:t>
+            </a:r>
+            <a:r>
+              <a:rPr sz="2050" b="0">
+                <a:solidFill>
+                  <a:srgbClr val="067D17"/>
+                </a:solidFill>
+                <a:latin typeface="JetBrains Mono"/>
+                <a:ea typeface="JetBrains Mono"/>
+                <a:cs typeface="JetBrains Mono"/>
+              </a:rPr>
+              <a:t>"Floor area: 9.0"</a:t>
+            </a:r>
+            <a:r>
+              <a:rPr sz="2400" b="0">
+                <a:solidFill>
+                  <a:srgbClr val="080808"/>
+                </a:solidFill>
+                <a:latin typeface="Calibri"/>
+                <a:ea typeface="Calibri"/>
+                <a:cs typeface="Calibri"/>
+              </a:rPr>
+              <a:t> and </a:t>
+            </a:r>
+            <a:r>
+              <a:rPr sz="2050" b="0">
+                <a:solidFill>
+                  <a:srgbClr val="067D17"/>
+                </a:solidFill>
+                <a:latin typeface="JetBrains Mono"/>
+                <a:ea typeface="JetBrains Mono"/>
+                <a:cs typeface="JetBrains Mono"/>
+              </a:rPr>
+              <a:t>"Carpet cost: 94.5"</a:t>
+            </a:r>
+            <a:r>
+              <a:rPr sz="2400" b="0">
+                <a:solidFill>
+                  <a:srgbClr val="080808"/>
+                </a:solidFill>
+                <a:latin typeface="Calibri"/>
+                <a:ea typeface="Calibri"/>
+                <a:cs typeface="Calibri"/>
+              </a:rPr>
+              <a:t>.</a:t>
             </a:r>
           </a:p>
         </p:txBody>

--- a/Mapped Curriculum Lessons/Grade 6/Lesson 03 - Decimal Numbers/Decimal Numbers - Slides.pptx
+++ b/Mapped Curriculum Lessons/Grade 6/Lesson 03 - Decimal Numbers/Decimal Numbers - Slides.pptx
@@ -2,28 +2,28 @@
 <file path=ppt/presentation.xml><?xml version="1.0" encoding="utf-8"?>
 <p:presentation xmlns:p="http://schemas.openxmlformats.org/presentationml/2006/main" embedTrueTypeFonts="1" saveSubsetFonts="0">
   <p:sldMasterIdLst>
-    <p:sldMasterId xmlns:r="http://schemas.openxmlformats.org/officeDocument/2006/relationships" id="2147483648" r:id="Rb486752f7bcb4106"/>
+    <p:sldMasterId xmlns:r="http://schemas.openxmlformats.org/officeDocument/2006/relationships" id="2147483648" r:id="R7783e3d55cae4eab"/>
   </p:sldMasterIdLst>
   <p:notesMasterIdLst>
-    <p:notesMasterId xmlns:r="http://schemas.openxmlformats.org/officeDocument/2006/relationships" r:id="Re0d08dcf6c95463d"/>
+    <p:notesMasterId xmlns:r="http://schemas.openxmlformats.org/officeDocument/2006/relationships" r:id="R530896dfa9604edb"/>
   </p:notesMasterIdLst>
   <p:sldIdLst>
-    <p:sldId xmlns:r="http://schemas.openxmlformats.org/officeDocument/2006/relationships" id="256" r:id="R67e72add5bcd48fd"/>
-    <p:sldId xmlns:r="http://schemas.openxmlformats.org/officeDocument/2006/relationships" id="257" r:id="R5af7eac0644d4433"/>
-    <p:sldId xmlns:r="http://schemas.openxmlformats.org/officeDocument/2006/relationships" id="258" r:id="R5fc04564d61d4d56"/>
-    <p:sldId xmlns:r="http://schemas.openxmlformats.org/officeDocument/2006/relationships" id="259" r:id="R613dd8e17dad4cdd"/>
-    <p:sldId xmlns:r="http://schemas.openxmlformats.org/officeDocument/2006/relationships" id="260" r:id="Rf0c6f763c8a240ed"/>
-    <p:sldId xmlns:r="http://schemas.openxmlformats.org/officeDocument/2006/relationships" id="261" r:id="R84fe368e0e2943e5"/>
-    <p:sldId xmlns:r="http://schemas.openxmlformats.org/officeDocument/2006/relationships" id="262" r:id="R0bc63b82ee6042f2"/>
-    <p:sldId xmlns:r="http://schemas.openxmlformats.org/officeDocument/2006/relationships" id="263" r:id="Re65ff085f6e64916"/>
-    <p:sldId xmlns:r="http://schemas.openxmlformats.org/officeDocument/2006/relationships" id="264" r:id="R8bf5f7571dd84aea"/>
+    <p:sldId xmlns:r="http://schemas.openxmlformats.org/officeDocument/2006/relationships" id="256" r:id="R2afcae82a3e5432c"/>
+    <p:sldId xmlns:r="http://schemas.openxmlformats.org/officeDocument/2006/relationships" id="257" r:id="R71586a9e2bfd426b"/>
+    <p:sldId xmlns:r="http://schemas.openxmlformats.org/officeDocument/2006/relationships" id="258" r:id="R53aa22ae03ae4144"/>
+    <p:sldId xmlns:r="http://schemas.openxmlformats.org/officeDocument/2006/relationships" id="259" r:id="R13ba26406b4245d0"/>
+    <p:sldId xmlns:r="http://schemas.openxmlformats.org/officeDocument/2006/relationships" id="260" r:id="R93471970e5794b30"/>
+    <p:sldId xmlns:r="http://schemas.openxmlformats.org/officeDocument/2006/relationships" id="261" r:id="R7c764dde70db4e79"/>
+    <p:sldId xmlns:r="http://schemas.openxmlformats.org/officeDocument/2006/relationships" id="262" r:id="R024bced41b214f35"/>
+    <p:sldId xmlns:r="http://schemas.openxmlformats.org/officeDocument/2006/relationships" id="263" r:id="Ra571d61cf66a4208"/>
+    <p:sldId xmlns:r="http://schemas.openxmlformats.org/officeDocument/2006/relationships" id="264" r:id="R7d00569730c34464"/>
   </p:sldIdLst>
   <p:sldSz cx="12192000" cy="6858000"/>
   <p:notesSz cx="6858000" cy="9144000"/>
   <p:embeddedFontLst>
     <p:embeddedFont>
       <p:font typeface="JetBrains Mono"/>
-      <p:regular xmlns:r="http://schemas.openxmlformats.org/officeDocument/2006/relationships" r:id="R108e8f1f3f614093"/>
+      <p:regular xmlns:r="http://schemas.openxmlformats.org/officeDocument/2006/relationships" r:id="Rbb9d7883cda94521"/>
     </p:embeddedFont>
   </p:embeddedFontLst>
 </p:presentation>
@@ -1071,7 +1071,7 @@
           <p:nvPr/>
         </p:nvPicPr>
         <p:blipFill rotWithShape="1">
-          <a:blip xmlns:r="http://schemas.openxmlformats.org/officeDocument/2006/relationships" xmlns:a="http://schemas.openxmlformats.org/drawingml/2006/main" r:embed="R539d2dd408b14132"/>
+          <a:blip xmlns:r="http://schemas.openxmlformats.org/officeDocument/2006/relationships" xmlns:a="http://schemas.openxmlformats.org/drawingml/2006/main" r:embed="Rf3b0c68d13444ead"/>
           <a:stretch xmlns:a="http://schemas.openxmlformats.org/drawingml/2006/main"/>
         </p:blipFill>
         <p:spPr>
@@ -1451,7 +1451,7 @@
           <p:nvPr/>
         </p:nvPicPr>
         <p:blipFill rotWithShape="1">
-          <a:blip xmlns:r="http://schemas.openxmlformats.org/officeDocument/2006/relationships" xmlns:a="http://schemas.openxmlformats.org/drawingml/2006/main" r:embed="Rde22622517224c19">
+          <a:blip xmlns:r="http://schemas.openxmlformats.org/officeDocument/2006/relationships" xmlns:a="http://schemas.openxmlformats.org/drawingml/2006/main" r:embed="Rb528e274a5934efc">
             <a:alphaModFix amt="28000"/>
           </a:blip>
           <a:stretch xmlns:a="http://schemas.openxmlformats.org/drawingml/2006/main"/>
@@ -1664,7 +1664,7 @@
           <p:nvPr/>
         </p:nvPicPr>
         <p:blipFill rotWithShape="1">
-          <a:blip xmlns:r="http://schemas.openxmlformats.org/officeDocument/2006/relationships" xmlns:a="http://schemas.openxmlformats.org/drawingml/2006/main" r:embed="R8c85e5b5c3c247b3">
+          <a:blip xmlns:r="http://schemas.openxmlformats.org/officeDocument/2006/relationships" xmlns:a="http://schemas.openxmlformats.org/drawingml/2006/main" r:embed="R6e1f2431766940d9">
             <a:alphaModFix amt="28000"/>
           </a:blip>
           <a:stretch xmlns:a="http://schemas.openxmlformats.org/drawingml/2006/main"/>
@@ -1899,7 +1899,7 @@
           <p:nvPr/>
         </p:nvPicPr>
         <p:blipFill rotWithShape="1">
-          <a:blip xmlns:r="http://schemas.openxmlformats.org/officeDocument/2006/relationships" xmlns:a="http://schemas.openxmlformats.org/drawingml/2006/main" r:embed="Rb2b42788c82a44d0">
+          <a:blip xmlns:r="http://schemas.openxmlformats.org/officeDocument/2006/relationships" xmlns:a="http://schemas.openxmlformats.org/drawingml/2006/main" r:embed="R3255e8b4d5594dd5">
             <a:alphaModFix amt="28000"/>
           </a:blip>
           <a:stretch xmlns:a="http://schemas.openxmlformats.org/drawingml/2006/main"/>
@@ -2176,7 +2176,7 @@
           <p:nvPr/>
         </p:nvPicPr>
         <p:blipFill rotWithShape="1">
-          <a:blip xmlns:r="http://schemas.openxmlformats.org/officeDocument/2006/relationships" xmlns:a="http://schemas.openxmlformats.org/drawingml/2006/main" r:embed="Rfa6e985cfc30467b">
+          <a:blip xmlns:r="http://schemas.openxmlformats.org/officeDocument/2006/relationships" xmlns:a="http://schemas.openxmlformats.org/drawingml/2006/main" r:embed="R37ac4fc2da93464f">
             <a:alphaModFix amt="28000"/>
           </a:blip>
           <a:stretch xmlns:a="http://schemas.openxmlformats.org/drawingml/2006/main"/>
@@ -2451,7 +2451,7 @@
           <p:nvPr/>
         </p:nvPicPr>
         <p:blipFill rotWithShape="1">
-          <a:blip xmlns:r="http://schemas.openxmlformats.org/officeDocument/2006/relationships" xmlns:a="http://schemas.openxmlformats.org/drawingml/2006/main" r:embed="R9f266a3d670b4df9">
+          <a:blip xmlns:r="http://schemas.openxmlformats.org/officeDocument/2006/relationships" xmlns:a="http://schemas.openxmlformats.org/drawingml/2006/main" r:embed="R74b7ca21ee1443a5">
             <a:alphaModFix amt="28000"/>
           </a:blip>
           <a:stretch xmlns:a="http://schemas.openxmlformats.org/drawingml/2006/main"/>
@@ -2875,7 +2875,7 @@
           <p:nvPr/>
         </p:nvPicPr>
         <p:blipFill rotWithShape="1">
-          <a:blip xmlns:r="http://schemas.openxmlformats.org/officeDocument/2006/relationships" xmlns:a="http://schemas.openxmlformats.org/drawingml/2006/main" r:embed="R94e4f4264ea849ff">
+          <a:blip xmlns:r="http://schemas.openxmlformats.org/officeDocument/2006/relationships" xmlns:a="http://schemas.openxmlformats.org/drawingml/2006/main" r:embed="R90034e01099f43a9">
             <a:alphaModFix amt="28000"/>
           </a:blip>
           <a:stretch xmlns:a="http://schemas.openxmlformats.org/drawingml/2006/main"/>
@@ -3016,7 +3016,7 @@
           <p:nvPr/>
         </p:nvPicPr>
         <p:blipFill rotWithShape="1">
-          <a:blip xmlns:r="http://schemas.openxmlformats.org/officeDocument/2006/relationships" xmlns:a="http://schemas.openxmlformats.org/drawingml/2006/main" r:embed="Rf6eed12047cc4b90">
+          <a:blip xmlns:r="http://schemas.openxmlformats.org/officeDocument/2006/relationships" xmlns:a="http://schemas.openxmlformats.org/drawingml/2006/main" r:embed="Rb9b1d6904bcf4d74">
             <a:alphaModFix amt="28000"/>
           </a:blip>
           <a:stretch xmlns:a="http://schemas.openxmlformats.org/drawingml/2006/main"/>
@@ -3130,7 +3130,7 @@
           <p:nvPr/>
         </p:nvPicPr>
         <p:blipFill rotWithShape="1">
-          <a:blip xmlns:r="http://schemas.openxmlformats.org/officeDocument/2006/relationships" xmlns:a="http://schemas.openxmlformats.org/drawingml/2006/main" r:embed="R6337270ccb234c86">
+          <a:blip xmlns:r="http://schemas.openxmlformats.org/officeDocument/2006/relationships" xmlns:a="http://schemas.openxmlformats.org/drawingml/2006/main" r:embed="R0fc5f7c9a7d840dc">
             <a:alphaModFix amt="28000"/>
           </a:blip>
           <a:stretch xmlns:a="http://schemas.openxmlformats.org/drawingml/2006/main"/>
@@ -3457,7 +3457,7 @@
           <p:nvPr/>
         </p:nvPicPr>
         <p:blipFill rotWithShape="1">
-          <a:blip xmlns:r="http://schemas.openxmlformats.org/officeDocument/2006/relationships" xmlns:a="http://schemas.openxmlformats.org/drawingml/2006/main" r:embed="R0c5b41d71f3a4ca1">
+          <a:blip xmlns:r="http://schemas.openxmlformats.org/officeDocument/2006/relationships" xmlns:a="http://schemas.openxmlformats.org/drawingml/2006/main" r:embed="R5051f3f972c54283">
             <a:alphaModFix amt="28000"/>
           </a:blip>
           <a:stretch xmlns:a="http://schemas.openxmlformats.org/drawingml/2006/main"/>
@@ -3745,7 +3745,7 @@
           <p:nvPr/>
         </p:nvPicPr>
         <p:blipFill rotWithShape="1">
-          <a:blip xmlns:r="http://schemas.openxmlformats.org/officeDocument/2006/relationships" xmlns:a="http://schemas.openxmlformats.org/drawingml/2006/main" r:embed="R0ce09abd8da848cd">
+          <a:blip xmlns:r="http://schemas.openxmlformats.org/officeDocument/2006/relationships" xmlns:a="http://schemas.openxmlformats.org/drawingml/2006/main" r:embed="Rb1640e443b9e4031">
             <a:alphaModFix amt="28000"/>
           </a:blip>
           <a:stretch xmlns:a="http://schemas.openxmlformats.org/drawingml/2006/main"/>
@@ -3982,17 +3982,17 @@
   </p:cSld>
   <p:clrMap bg1="lt1" tx1="dk1" bg2="lt2" tx2="dk2" accent1="accent1" accent2="accent2" accent3="accent3" accent4="accent4" accent5="accent5" accent6="accent6" hlink="hlink" folHlink="folHlink"/>
   <p:sldLayoutIdLst>
-    <p:sldLayoutId xmlns:r="http://schemas.openxmlformats.org/officeDocument/2006/relationships" id="2147483649" r:id="R7c2319bca4574c44"/>
-    <p:sldLayoutId xmlns:r="http://schemas.openxmlformats.org/officeDocument/2006/relationships" id="2147483650" r:id="R66f41322f4ee4dcc"/>
-    <p:sldLayoutId xmlns:r="http://schemas.openxmlformats.org/officeDocument/2006/relationships" id="2147483651" r:id="R90e03895028c4cf6"/>
-    <p:sldLayoutId xmlns:r="http://schemas.openxmlformats.org/officeDocument/2006/relationships" id="2147483652" r:id="Re9e22dbcc41240bb"/>
-    <p:sldLayoutId xmlns:r="http://schemas.openxmlformats.org/officeDocument/2006/relationships" id="2147483653" r:id="Rb16b82c5edae4acc"/>
-    <p:sldLayoutId xmlns:r="http://schemas.openxmlformats.org/officeDocument/2006/relationships" id="2147483654" r:id="R12b00bc297834e4e"/>
-    <p:sldLayoutId xmlns:r="http://schemas.openxmlformats.org/officeDocument/2006/relationships" id="2147483655" r:id="Rdb908a6f0c7441a5"/>
-    <p:sldLayoutId xmlns:r="http://schemas.openxmlformats.org/officeDocument/2006/relationships" id="2147483656" r:id="Rb5a5edda219b420c"/>
-    <p:sldLayoutId xmlns:r="http://schemas.openxmlformats.org/officeDocument/2006/relationships" id="2147483657" r:id="R004279089fc14b84"/>
-    <p:sldLayoutId xmlns:r="http://schemas.openxmlformats.org/officeDocument/2006/relationships" id="2147483658" r:id="R36f2c8b793c546d3"/>
-    <p:sldLayoutId xmlns:r="http://schemas.openxmlformats.org/officeDocument/2006/relationships" id="2147483659" r:id="R998edf74d95b48c8"/>
+    <p:sldLayoutId xmlns:r="http://schemas.openxmlformats.org/officeDocument/2006/relationships" id="2147483649" r:id="Rf6a233f75e02414f"/>
+    <p:sldLayoutId xmlns:r="http://schemas.openxmlformats.org/officeDocument/2006/relationships" id="2147483650" r:id="Rc9a1923947df4ce7"/>
+    <p:sldLayoutId xmlns:r="http://schemas.openxmlformats.org/officeDocument/2006/relationships" id="2147483651" r:id="R904fac739bf44974"/>
+    <p:sldLayoutId xmlns:r="http://schemas.openxmlformats.org/officeDocument/2006/relationships" id="2147483652" r:id="R74fbfc345bb846a3"/>
+    <p:sldLayoutId xmlns:r="http://schemas.openxmlformats.org/officeDocument/2006/relationships" id="2147483653" r:id="Ref26710d7cb04330"/>
+    <p:sldLayoutId xmlns:r="http://schemas.openxmlformats.org/officeDocument/2006/relationships" id="2147483654" r:id="Rf4322aa1429b4ffb"/>
+    <p:sldLayoutId xmlns:r="http://schemas.openxmlformats.org/officeDocument/2006/relationships" id="2147483655" r:id="Rb8cea31717d741d5"/>
+    <p:sldLayoutId xmlns:r="http://schemas.openxmlformats.org/officeDocument/2006/relationships" id="2147483656" r:id="R28bddcdba0fc4580"/>
+    <p:sldLayoutId xmlns:r="http://schemas.openxmlformats.org/officeDocument/2006/relationships" id="2147483657" r:id="R288c87821bfa4c2c"/>
+    <p:sldLayoutId xmlns:r="http://schemas.openxmlformats.org/officeDocument/2006/relationships" id="2147483658" r:id="Rc82ac4e99f524b64"/>
+    <p:sldLayoutId xmlns:r="http://schemas.openxmlformats.org/officeDocument/2006/relationships" id="2147483659" r:id="R54190650a70e428e"/>
   </p:sldLayoutIdLst>
   <p:hf hdr="0" ftr="0" dt="0"/>
   <p:txStyles>

--- a/Mapped Curriculum Lessons/Grade 6/Lesson 03 - Decimal Numbers/Decimal Numbers - Slides.pptx
+++ b/Mapped Curriculum Lessons/Grade 6/Lesson 03 - Decimal Numbers/Decimal Numbers - Slides.pptx
@@ -2,28 +2,28 @@
 <file path=ppt/presentation.xml><?xml version="1.0" encoding="utf-8"?>
 <p:presentation xmlns:p="http://schemas.openxmlformats.org/presentationml/2006/main" embedTrueTypeFonts="1" saveSubsetFonts="0">
   <p:sldMasterIdLst>
-    <p:sldMasterId xmlns:r="http://schemas.openxmlformats.org/officeDocument/2006/relationships" id="2147483648" r:id="R7783e3d55cae4eab"/>
+    <p:sldMasterId xmlns:r="http://schemas.openxmlformats.org/officeDocument/2006/relationships" id="2147483648" r:id="R870dc23390d74d13"/>
   </p:sldMasterIdLst>
   <p:notesMasterIdLst>
-    <p:notesMasterId xmlns:r="http://schemas.openxmlformats.org/officeDocument/2006/relationships" r:id="R530896dfa9604edb"/>
+    <p:notesMasterId xmlns:r="http://schemas.openxmlformats.org/officeDocument/2006/relationships" r:id="Re7078f911bdf46c8"/>
   </p:notesMasterIdLst>
   <p:sldIdLst>
-    <p:sldId xmlns:r="http://schemas.openxmlformats.org/officeDocument/2006/relationships" id="256" r:id="R2afcae82a3e5432c"/>
-    <p:sldId xmlns:r="http://schemas.openxmlformats.org/officeDocument/2006/relationships" id="257" r:id="R71586a9e2bfd426b"/>
-    <p:sldId xmlns:r="http://schemas.openxmlformats.org/officeDocument/2006/relationships" id="258" r:id="R53aa22ae03ae4144"/>
-    <p:sldId xmlns:r="http://schemas.openxmlformats.org/officeDocument/2006/relationships" id="259" r:id="R13ba26406b4245d0"/>
-    <p:sldId xmlns:r="http://schemas.openxmlformats.org/officeDocument/2006/relationships" id="260" r:id="R93471970e5794b30"/>
-    <p:sldId xmlns:r="http://schemas.openxmlformats.org/officeDocument/2006/relationships" id="261" r:id="R7c764dde70db4e79"/>
-    <p:sldId xmlns:r="http://schemas.openxmlformats.org/officeDocument/2006/relationships" id="262" r:id="R024bced41b214f35"/>
-    <p:sldId xmlns:r="http://schemas.openxmlformats.org/officeDocument/2006/relationships" id="263" r:id="Ra571d61cf66a4208"/>
-    <p:sldId xmlns:r="http://schemas.openxmlformats.org/officeDocument/2006/relationships" id="264" r:id="R7d00569730c34464"/>
+    <p:sldId xmlns:r="http://schemas.openxmlformats.org/officeDocument/2006/relationships" id="256" r:id="R6e8da36691e54a38"/>
+    <p:sldId xmlns:r="http://schemas.openxmlformats.org/officeDocument/2006/relationships" id="257" r:id="Rf72d12e243374ec8"/>
+    <p:sldId xmlns:r="http://schemas.openxmlformats.org/officeDocument/2006/relationships" id="258" r:id="R29ba8060dc9b4b90"/>
+    <p:sldId xmlns:r="http://schemas.openxmlformats.org/officeDocument/2006/relationships" id="259" r:id="Rdbe67b6556974648"/>
+    <p:sldId xmlns:r="http://schemas.openxmlformats.org/officeDocument/2006/relationships" id="260" r:id="R67877478cf744c02"/>
+    <p:sldId xmlns:r="http://schemas.openxmlformats.org/officeDocument/2006/relationships" id="261" r:id="R488e6b1e2d8a454e"/>
+    <p:sldId xmlns:r="http://schemas.openxmlformats.org/officeDocument/2006/relationships" id="262" r:id="Rb4e8b1a5421d4d75"/>
+    <p:sldId xmlns:r="http://schemas.openxmlformats.org/officeDocument/2006/relationships" id="263" r:id="Rd7ccce9d41854d36"/>
+    <p:sldId xmlns:r="http://schemas.openxmlformats.org/officeDocument/2006/relationships" id="264" r:id="Rda69f9e97b744c5f"/>
   </p:sldIdLst>
   <p:sldSz cx="12192000" cy="6858000"/>
   <p:notesSz cx="6858000" cy="9144000"/>
   <p:embeddedFontLst>
     <p:embeddedFont>
       <p:font typeface="JetBrains Mono"/>
-      <p:regular xmlns:r="http://schemas.openxmlformats.org/officeDocument/2006/relationships" r:id="Rbb9d7883cda94521"/>
+      <p:regular xmlns:r="http://schemas.openxmlformats.org/officeDocument/2006/relationships" r:id="R0c1224bfb5b04d67"/>
     </p:embeddedFont>
   </p:embeddedFontLst>
 </p:presentation>
@@ -1071,7 +1071,7 @@
           <p:nvPr/>
         </p:nvPicPr>
         <p:blipFill rotWithShape="1">
-          <a:blip xmlns:r="http://schemas.openxmlformats.org/officeDocument/2006/relationships" xmlns:a="http://schemas.openxmlformats.org/drawingml/2006/main" r:embed="Rf3b0c68d13444ead"/>
+          <a:blip xmlns:r="http://schemas.openxmlformats.org/officeDocument/2006/relationships" xmlns:a="http://schemas.openxmlformats.org/drawingml/2006/main" r:embed="R1b924ef88b304e6b"/>
           <a:stretch xmlns:a="http://schemas.openxmlformats.org/drawingml/2006/main"/>
         </p:blipFill>
         <p:spPr>
@@ -1451,7 +1451,7 @@
           <p:nvPr/>
         </p:nvPicPr>
         <p:blipFill rotWithShape="1">
-          <a:blip xmlns:r="http://schemas.openxmlformats.org/officeDocument/2006/relationships" xmlns:a="http://schemas.openxmlformats.org/drawingml/2006/main" r:embed="Rb528e274a5934efc">
+          <a:blip xmlns:r="http://schemas.openxmlformats.org/officeDocument/2006/relationships" xmlns:a="http://schemas.openxmlformats.org/drawingml/2006/main" r:embed="R0c0f28d5364f46aa">
             <a:alphaModFix amt="28000"/>
           </a:blip>
           <a:stretch xmlns:a="http://schemas.openxmlformats.org/drawingml/2006/main"/>
@@ -1664,7 +1664,7 @@
           <p:nvPr/>
         </p:nvPicPr>
         <p:blipFill rotWithShape="1">
-          <a:blip xmlns:r="http://schemas.openxmlformats.org/officeDocument/2006/relationships" xmlns:a="http://schemas.openxmlformats.org/drawingml/2006/main" r:embed="R6e1f2431766940d9">
+          <a:blip xmlns:r="http://schemas.openxmlformats.org/officeDocument/2006/relationships" xmlns:a="http://schemas.openxmlformats.org/drawingml/2006/main" r:embed="R4207c749bf744c21">
             <a:alphaModFix amt="28000"/>
           </a:blip>
           <a:stretch xmlns:a="http://schemas.openxmlformats.org/drawingml/2006/main"/>
@@ -1899,7 +1899,7 @@
           <p:nvPr/>
         </p:nvPicPr>
         <p:blipFill rotWithShape="1">
-          <a:blip xmlns:r="http://schemas.openxmlformats.org/officeDocument/2006/relationships" xmlns:a="http://schemas.openxmlformats.org/drawingml/2006/main" r:embed="R3255e8b4d5594dd5">
+          <a:blip xmlns:r="http://schemas.openxmlformats.org/officeDocument/2006/relationships" xmlns:a="http://schemas.openxmlformats.org/drawingml/2006/main" r:embed="R9b0b91d54b3d48a7">
             <a:alphaModFix amt="28000"/>
           </a:blip>
           <a:stretch xmlns:a="http://schemas.openxmlformats.org/drawingml/2006/main"/>
@@ -2176,7 +2176,7 @@
           <p:nvPr/>
         </p:nvPicPr>
         <p:blipFill rotWithShape="1">
-          <a:blip xmlns:r="http://schemas.openxmlformats.org/officeDocument/2006/relationships" xmlns:a="http://schemas.openxmlformats.org/drawingml/2006/main" r:embed="R37ac4fc2da93464f">
+          <a:blip xmlns:r="http://schemas.openxmlformats.org/officeDocument/2006/relationships" xmlns:a="http://schemas.openxmlformats.org/drawingml/2006/main" r:embed="Rd9854700774849fc">
             <a:alphaModFix amt="28000"/>
           </a:blip>
           <a:stretch xmlns:a="http://schemas.openxmlformats.org/drawingml/2006/main"/>
@@ -2451,7 +2451,7 @@
           <p:nvPr/>
         </p:nvPicPr>
         <p:blipFill rotWithShape="1">
-          <a:blip xmlns:r="http://schemas.openxmlformats.org/officeDocument/2006/relationships" xmlns:a="http://schemas.openxmlformats.org/drawingml/2006/main" r:embed="R74b7ca21ee1443a5">
+          <a:blip xmlns:r="http://schemas.openxmlformats.org/officeDocument/2006/relationships" xmlns:a="http://schemas.openxmlformats.org/drawingml/2006/main" r:embed="Rcfee4f311566456b">
             <a:alphaModFix amt="28000"/>
           </a:blip>
           <a:stretch xmlns:a="http://schemas.openxmlformats.org/drawingml/2006/main"/>
@@ -2875,7 +2875,7 @@
           <p:nvPr/>
         </p:nvPicPr>
         <p:blipFill rotWithShape="1">
-          <a:blip xmlns:r="http://schemas.openxmlformats.org/officeDocument/2006/relationships" xmlns:a="http://schemas.openxmlformats.org/drawingml/2006/main" r:embed="R90034e01099f43a9">
+          <a:blip xmlns:r="http://schemas.openxmlformats.org/officeDocument/2006/relationships" xmlns:a="http://schemas.openxmlformats.org/drawingml/2006/main" r:embed="R9ffa0eb5103a4c86">
             <a:alphaModFix amt="28000"/>
           </a:blip>
           <a:stretch xmlns:a="http://schemas.openxmlformats.org/drawingml/2006/main"/>
@@ -3016,7 +3016,7 @@
           <p:nvPr/>
         </p:nvPicPr>
         <p:blipFill rotWithShape="1">
-          <a:blip xmlns:r="http://schemas.openxmlformats.org/officeDocument/2006/relationships" xmlns:a="http://schemas.openxmlformats.org/drawingml/2006/main" r:embed="Rb9b1d6904bcf4d74">
+          <a:blip xmlns:r="http://schemas.openxmlformats.org/officeDocument/2006/relationships" xmlns:a="http://schemas.openxmlformats.org/drawingml/2006/main" r:embed="R1303472e5259420e">
             <a:alphaModFix amt="28000"/>
           </a:blip>
           <a:stretch xmlns:a="http://schemas.openxmlformats.org/drawingml/2006/main"/>
@@ -3130,7 +3130,7 @@
           <p:nvPr/>
         </p:nvPicPr>
         <p:blipFill rotWithShape="1">
-          <a:blip xmlns:r="http://schemas.openxmlformats.org/officeDocument/2006/relationships" xmlns:a="http://schemas.openxmlformats.org/drawingml/2006/main" r:embed="R0fc5f7c9a7d840dc">
+          <a:blip xmlns:r="http://schemas.openxmlformats.org/officeDocument/2006/relationships" xmlns:a="http://schemas.openxmlformats.org/drawingml/2006/main" r:embed="R30d6d83ce6ca4240">
             <a:alphaModFix amt="28000"/>
           </a:blip>
           <a:stretch xmlns:a="http://schemas.openxmlformats.org/drawingml/2006/main"/>
@@ -3457,7 +3457,7 @@
           <p:nvPr/>
         </p:nvPicPr>
         <p:blipFill rotWithShape="1">
-          <a:blip xmlns:r="http://schemas.openxmlformats.org/officeDocument/2006/relationships" xmlns:a="http://schemas.openxmlformats.org/drawingml/2006/main" r:embed="R5051f3f972c54283">
+          <a:blip xmlns:r="http://schemas.openxmlformats.org/officeDocument/2006/relationships" xmlns:a="http://schemas.openxmlformats.org/drawingml/2006/main" r:embed="Rc9feeb713f9445dd">
             <a:alphaModFix amt="28000"/>
           </a:blip>
           <a:stretch xmlns:a="http://schemas.openxmlformats.org/drawingml/2006/main"/>
@@ -3745,7 +3745,7 @@
           <p:nvPr/>
         </p:nvPicPr>
         <p:blipFill rotWithShape="1">
-          <a:blip xmlns:r="http://schemas.openxmlformats.org/officeDocument/2006/relationships" xmlns:a="http://schemas.openxmlformats.org/drawingml/2006/main" r:embed="Rb1640e443b9e4031">
+          <a:blip xmlns:r="http://schemas.openxmlformats.org/officeDocument/2006/relationships" xmlns:a="http://schemas.openxmlformats.org/drawingml/2006/main" r:embed="R18d9a4e7691b4cc2">
             <a:alphaModFix amt="28000"/>
           </a:blip>
           <a:stretch xmlns:a="http://schemas.openxmlformats.org/drawingml/2006/main"/>
@@ -3982,17 +3982,17 @@
   </p:cSld>
   <p:clrMap bg1="lt1" tx1="dk1" bg2="lt2" tx2="dk2" accent1="accent1" accent2="accent2" accent3="accent3" accent4="accent4" accent5="accent5" accent6="accent6" hlink="hlink" folHlink="folHlink"/>
   <p:sldLayoutIdLst>
-    <p:sldLayoutId xmlns:r="http://schemas.openxmlformats.org/officeDocument/2006/relationships" id="2147483649" r:id="Rf6a233f75e02414f"/>
-    <p:sldLayoutId xmlns:r="http://schemas.openxmlformats.org/officeDocument/2006/relationships" id="2147483650" r:id="Rc9a1923947df4ce7"/>
-    <p:sldLayoutId xmlns:r="http://schemas.openxmlformats.org/officeDocument/2006/relationships" id="2147483651" r:id="R904fac739bf44974"/>
-    <p:sldLayoutId xmlns:r="http://schemas.openxmlformats.org/officeDocument/2006/relationships" id="2147483652" r:id="R74fbfc345bb846a3"/>
-    <p:sldLayoutId xmlns:r="http://schemas.openxmlformats.org/officeDocument/2006/relationships" id="2147483653" r:id="Ref26710d7cb04330"/>
-    <p:sldLayoutId xmlns:r="http://schemas.openxmlformats.org/officeDocument/2006/relationships" id="2147483654" r:id="Rf4322aa1429b4ffb"/>
-    <p:sldLayoutId xmlns:r="http://schemas.openxmlformats.org/officeDocument/2006/relationships" id="2147483655" r:id="Rb8cea31717d741d5"/>
-    <p:sldLayoutId xmlns:r="http://schemas.openxmlformats.org/officeDocument/2006/relationships" id="2147483656" r:id="R28bddcdba0fc4580"/>
-    <p:sldLayoutId xmlns:r="http://schemas.openxmlformats.org/officeDocument/2006/relationships" id="2147483657" r:id="R288c87821bfa4c2c"/>
-    <p:sldLayoutId xmlns:r="http://schemas.openxmlformats.org/officeDocument/2006/relationships" id="2147483658" r:id="Rc82ac4e99f524b64"/>
-    <p:sldLayoutId xmlns:r="http://schemas.openxmlformats.org/officeDocument/2006/relationships" id="2147483659" r:id="R54190650a70e428e"/>
+    <p:sldLayoutId xmlns:r="http://schemas.openxmlformats.org/officeDocument/2006/relationships" id="2147483649" r:id="R3f19ba02d43f45c1"/>
+    <p:sldLayoutId xmlns:r="http://schemas.openxmlformats.org/officeDocument/2006/relationships" id="2147483650" r:id="R1b23247ecf514397"/>
+    <p:sldLayoutId xmlns:r="http://schemas.openxmlformats.org/officeDocument/2006/relationships" id="2147483651" r:id="R4864ab7270d540e7"/>
+    <p:sldLayoutId xmlns:r="http://schemas.openxmlformats.org/officeDocument/2006/relationships" id="2147483652" r:id="R78b8288b99b94160"/>
+    <p:sldLayoutId xmlns:r="http://schemas.openxmlformats.org/officeDocument/2006/relationships" id="2147483653" r:id="Ra4265248478e4ff6"/>
+    <p:sldLayoutId xmlns:r="http://schemas.openxmlformats.org/officeDocument/2006/relationships" id="2147483654" r:id="Rb1b6722c018345d7"/>
+    <p:sldLayoutId xmlns:r="http://schemas.openxmlformats.org/officeDocument/2006/relationships" id="2147483655" r:id="R7a65e5252ac84431"/>
+    <p:sldLayoutId xmlns:r="http://schemas.openxmlformats.org/officeDocument/2006/relationships" id="2147483656" r:id="Raa3fc7bcca474ba2"/>
+    <p:sldLayoutId xmlns:r="http://schemas.openxmlformats.org/officeDocument/2006/relationships" id="2147483657" r:id="Rcd6d77e1dfba4c18"/>
+    <p:sldLayoutId xmlns:r="http://schemas.openxmlformats.org/officeDocument/2006/relationships" id="2147483658" r:id="Rb601b55f8a7a4df4"/>
+    <p:sldLayoutId xmlns:r="http://schemas.openxmlformats.org/officeDocument/2006/relationships" id="2147483659" r:id="R905dbfe4c26d48c5"/>
   </p:sldLayoutIdLst>
   <p:hf hdr="0" ftr="0" dt="0"/>
   <p:txStyles>

--- a/Mapped Curriculum Lessons/Grade 6/Lesson 03 - Decimal Numbers/Decimal Numbers - Slides.pptx
+++ b/Mapped Curriculum Lessons/Grade 6/Lesson 03 - Decimal Numbers/Decimal Numbers - Slides.pptx
@@ -2,28 +2,28 @@
 <file path=ppt/presentation.xml><?xml version="1.0" encoding="utf-8"?>
 <p:presentation xmlns:p="http://schemas.openxmlformats.org/presentationml/2006/main" embedTrueTypeFonts="1" saveSubsetFonts="0">
   <p:sldMasterIdLst>
-    <p:sldMasterId xmlns:r="http://schemas.openxmlformats.org/officeDocument/2006/relationships" id="2147483648" r:id="R870dc23390d74d13"/>
+    <p:sldMasterId xmlns:r="http://schemas.openxmlformats.org/officeDocument/2006/relationships" id="2147483648" r:id="Rf486d95a59e64811"/>
   </p:sldMasterIdLst>
   <p:notesMasterIdLst>
-    <p:notesMasterId xmlns:r="http://schemas.openxmlformats.org/officeDocument/2006/relationships" r:id="Re7078f911bdf46c8"/>
+    <p:notesMasterId xmlns:r="http://schemas.openxmlformats.org/officeDocument/2006/relationships" r:id="R670c186c7ce84b4e"/>
   </p:notesMasterIdLst>
   <p:sldIdLst>
-    <p:sldId xmlns:r="http://schemas.openxmlformats.org/officeDocument/2006/relationships" id="256" r:id="R6e8da36691e54a38"/>
-    <p:sldId xmlns:r="http://schemas.openxmlformats.org/officeDocument/2006/relationships" id="257" r:id="Rf72d12e243374ec8"/>
-    <p:sldId xmlns:r="http://schemas.openxmlformats.org/officeDocument/2006/relationships" id="258" r:id="R29ba8060dc9b4b90"/>
-    <p:sldId xmlns:r="http://schemas.openxmlformats.org/officeDocument/2006/relationships" id="259" r:id="Rdbe67b6556974648"/>
-    <p:sldId xmlns:r="http://schemas.openxmlformats.org/officeDocument/2006/relationships" id="260" r:id="R67877478cf744c02"/>
-    <p:sldId xmlns:r="http://schemas.openxmlformats.org/officeDocument/2006/relationships" id="261" r:id="R488e6b1e2d8a454e"/>
-    <p:sldId xmlns:r="http://schemas.openxmlformats.org/officeDocument/2006/relationships" id="262" r:id="Rb4e8b1a5421d4d75"/>
-    <p:sldId xmlns:r="http://schemas.openxmlformats.org/officeDocument/2006/relationships" id="263" r:id="Rd7ccce9d41854d36"/>
-    <p:sldId xmlns:r="http://schemas.openxmlformats.org/officeDocument/2006/relationships" id="264" r:id="Rda69f9e97b744c5f"/>
+    <p:sldId xmlns:r="http://schemas.openxmlformats.org/officeDocument/2006/relationships" id="256" r:id="R37840970763e4539"/>
+    <p:sldId xmlns:r="http://schemas.openxmlformats.org/officeDocument/2006/relationships" id="257" r:id="Ra3a0e096321347c0"/>
+    <p:sldId xmlns:r="http://schemas.openxmlformats.org/officeDocument/2006/relationships" id="258" r:id="R69d7daaacd7c469f"/>
+    <p:sldId xmlns:r="http://schemas.openxmlformats.org/officeDocument/2006/relationships" id="259" r:id="R9311b1d43b624677"/>
+    <p:sldId xmlns:r="http://schemas.openxmlformats.org/officeDocument/2006/relationships" id="260" r:id="Rfc81fb319d5c451e"/>
+    <p:sldId xmlns:r="http://schemas.openxmlformats.org/officeDocument/2006/relationships" id="261" r:id="R1b380e6e0e4e4d55"/>
+    <p:sldId xmlns:r="http://schemas.openxmlformats.org/officeDocument/2006/relationships" id="262" r:id="R541ebd46277c44c7"/>
+    <p:sldId xmlns:r="http://schemas.openxmlformats.org/officeDocument/2006/relationships" id="263" r:id="R2500df70224e46b2"/>
+    <p:sldId xmlns:r="http://schemas.openxmlformats.org/officeDocument/2006/relationships" id="264" r:id="R289542f8c2ef45d1"/>
   </p:sldIdLst>
   <p:sldSz cx="12192000" cy="6858000"/>
   <p:notesSz cx="6858000" cy="9144000"/>
   <p:embeddedFontLst>
     <p:embeddedFont>
       <p:font typeface="JetBrains Mono"/>
-      <p:regular xmlns:r="http://schemas.openxmlformats.org/officeDocument/2006/relationships" r:id="R0c1224bfb5b04d67"/>
+      <p:regular xmlns:r="http://schemas.openxmlformats.org/officeDocument/2006/relationships" r:id="R56d13f39aae2454e"/>
     </p:embeddedFont>
   </p:embeddedFontLst>
 </p:presentation>
@@ -1071,7 +1071,7 @@
           <p:nvPr/>
         </p:nvPicPr>
         <p:blipFill rotWithShape="1">
-          <a:blip xmlns:r="http://schemas.openxmlformats.org/officeDocument/2006/relationships" xmlns:a="http://schemas.openxmlformats.org/drawingml/2006/main" r:embed="R1b924ef88b304e6b"/>
+          <a:blip xmlns:r="http://schemas.openxmlformats.org/officeDocument/2006/relationships" xmlns:a="http://schemas.openxmlformats.org/drawingml/2006/main" r:embed="R43193fe1f49541e1"/>
           <a:stretch xmlns:a="http://schemas.openxmlformats.org/drawingml/2006/main"/>
         </p:blipFill>
         <p:spPr>
@@ -1451,7 +1451,7 @@
           <p:nvPr/>
         </p:nvPicPr>
         <p:blipFill rotWithShape="1">
-          <a:blip xmlns:r="http://schemas.openxmlformats.org/officeDocument/2006/relationships" xmlns:a="http://schemas.openxmlformats.org/drawingml/2006/main" r:embed="R0c0f28d5364f46aa">
+          <a:blip xmlns:r="http://schemas.openxmlformats.org/officeDocument/2006/relationships" xmlns:a="http://schemas.openxmlformats.org/drawingml/2006/main" r:embed="Rf80667cab66647ff">
             <a:alphaModFix amt="28000"/>
           </a:blip>
           <a:stretch xmlns:a="http://schemas.openxmlformats.org/drawingml/2006/main"/>
@@ -1664,7 +1664,7 @@
           <p:nvPr/>
         </p:nvPicPr>
         <p:blipFill rotWithShape="1">
-          <a:blip xmlns:r="http://schemas.openxmlformats.org/officeDocument/2006/relationships" xmlns:a="http://schemas.openxmlformats.org/drawingml/2006/main" r:embed="R4207c749bf744c21">
+          <a:blip xmlns:r="http://schemas.openxmlformats.org/officeDocument/2006/relationships" xmlns:a="http://schemas.openxmlformats.org/drawingml/2006/main" r:embed="R50f2f9564d61481f">
             <a:alphaModFix amt="28000"/>
           </a:blip>
           <a:stretch xmlns:a="http://schemas.openxmlformats.org/drawingml/2006/main"/>
@@ -1899,7 +1899,7 @@
           <p:nvPr/>
         </p:nvPicPr>
         <p:blipFill rotWithShape="1">
-          <a:blip xmlns:r="http://schemas.openxmlformats.org/officeDocument/2006/relationships" xmlns:a="http://schemas.openxmlformats.org/drawingml/2006/main" r:embed="R9b0b91d54b3d48a7">
+          <a:blip xmlns:r="http://schemas.openxmlformats.org/officeDocument/2006/relationships" xmlns:a="http://schemas.openxmlformats.org/drawingml/2006/main" r:embed="R7517f115babd4989">
             <a:alphaModFix amt="28000"/>
           </a:blip>
           <a:stretch xmlns:a="http://schemas.openxmlformats.org/drawingml/2006/main"/>
@@ -2176,7 +2176,7 @@
           <p:nvPr/>
         </p:nvPicPr>
         <p:blipFill rotWithShape="1">
-          <a:blip xmlns:r="http://schemas.openxmlformats.org/officeDocument/2006/relationships" xmlns:a="http://schemas.openxmlformats.org/drawingml/2006/main" r:embed="Rd9854700774849fc">
+          <a:blip xmlns:r="http://schemas.openxmlformats.org/officeDocument/2006/relationships" xmlns:a="http://schemas.openxmlformats.org/drawingml/2006/main" r:embed="R29313cc9edac44af">
             <a:alphaModFix amt="28000"/>
           </a:blip>
           <a:stretch xmlns:a="http://schemas.openxmlformats.org/drawingml/2006/main"/>
@@ -2451,7 +2451,7 @@
           <p:nvPr/>
         </p:nvPicPr>
         <p:blipFill rotWithShape="1">
-          <a:blip xmlns:r="http://schemas.openxmlformats.org/officeDocument/2006/relationships" xmlns:a="http://schemas.openxmlformats.org/drawingml/2006/main" r:embed="Rcfee4f311566456b">
+          <a:blip xmlns:r="http://schemas.openxmlformats.org/officeDocument/2006/relationships" xmlns:a="http://schemas.openxmlformats.org/drawingml/2006/main" r:embed="R1618f447e0c24ef1">
             <a:alphaModFix amt="28000"/>
           </a:blip>
           <a:stretch xmlns:a="http://schemas.openxmlformats.org/drawingml/2006/main"/>
@@ -2875,7 +2875,7 @@
           <p:nvPr/>
         </p:nvPicPr>
         <p:blipFill rotWithShape="1">
-          <a:blip xmlns:r="http://schemas.openxmlformats.org/officeDocument/2006/relationships" xmlns:a="http://schemas.openxmlformats.org/drawingml/2006/main" r:embed="R9ffa0eb5103a4c86">
+          <a:blip xmlns:r="http://schemas.openxmlformats.org/officeDocument/2006/relationships" xmlns:a="http://schemas.openxmlformats.org/drawingml/2006/main" r:embed="R2ed8a929fee14aba">
             <a:alphaModFix amt="28000"/>
           </a:blip>
           <a:stretch xmlns:a="http://schemas.openxmlformats.org/drawingml/2006/main"/>
@@ -3016,7 +3016,7 @@
           <p:nvPr/>
         </p:nvPicPr>
         <p:blipFill rotWithShape="1">
-          <a:blip xmlns:r="http://schemas.openxmlformats.org/officeDocument/2006/relationships" xmlns:a="http://schemas.openxmlformats.org/drawingml/2006/main" r:embed="R1303472e5259420e">
+          <a:blip xmlns:r="http://schemas.openxmlformats.org/officeDocument/2006/relationships" xmlns:a="http://schemas.openxmlformats.org/drawingml/2006/main" r:embed="Rda1cd3f76a9d4f8b">
             <a:alphaModFix amt="28000"/>
           </a:blip>
           <a:stretch xmlns:a="http://schemas.openxmlformats.org/drawingml/2006/main"/>
@@ -3130,7 +3130,7 @@
           <p:nvPr/>
         </p:nvPicPr>
         <p:blipFill rotWithShape="1">
-          <a:blip xmlns:r="http://schemas.openxmlformats.org/officeDocument/2006/relationships" xmlns:a="http://schemas.openxmlformats.org/drawingml/2006/main" r:embed="R30d6d83ce6ca4240">
+          <a:blip xmlns:r="http://schemas.openxmlformats.org/officeDocument/2006/relationships" xmlns:a="http://schemas.openxmlformats.org/drawingml/2006/main" r:embed="R1d0f85fc9c1c407d">
             <a:alphaModFix amt="28000"/>
           </a:blip>
           <a:stretch xmlns:a="http://schemas.openxmlformats.org/drawingml/2006/main"/>
@@ -3457,7 +3457,7 @@
           <p:nvPr/>
         </p:nvPicPr>
         <p:blipFill rotWithShape="1">
-          <a:blip xmlns:r="http://schemas.openxmlformats.org/officeDocument/2006/relationships" xmlns:a="http://schemas.openxmlformats.org/drawingml/2006/main" r:embed="Rc9feeb713f9445dd">
+          <a:blip xmlns:r="http://schemas.openxmlformats.org/officeDocument/2006/relationships" xmlns:a="http://schemas.openxmlformats.org/drawingml/2006/main" r:embed="Rb843e1adf6384545">
             <a:alphaModFix amt="28000"/>
           </a:blip>
           <a:stretch xmlns:a="http://schemas.openxmlformats.org/drawingml/2006/main"/>
@@ -3745,7 +3745,7 @@
           <p:nvPr/>
         </p:nvPicPr>
         <p:blipFill rotWithShape="1">
-          <a:blip xmlns:r="http://schemas.openxmlformats.org/officeDocument/2006/relationships" xmlns:a="http://schemas.openxmlformats.org/drawingml/2006/main" r:embed="R18d9a4e7691b4cc2">
+          <a:blip xmlns:r="http://schemas.openxmlformats.org/officeDocument/2006/relationships" xmlns:a="http://schemas.openxmlformats.org/drawingml/2006/main" r:embed="R58160e86f3704739">
             <a:alphaModFix amt="28000"/>
           </a:blip>
           <a:stretch xmlns:a="http://schemas.openxmlformats.org/drawingml/2006/main"/>
@@ -3982,17 +3982,17 @@
   </p:cSld>
   <p:clrMap bg1="lt1" tx1="dk1" bg2="lt2" tx2="dk2" accent1="accent1" accent2="accent2" accent3="accent3" accent4="accent4" accent5="accent5" accent6="accent6" hlink="hlink" folHlink="folHlink"/>
   <p:sldLayoutIdLst>
-    <p:sldLayoutId xmlns:r="http://schemas.openxmlformats.org/officeDocument/2006/relationships" id="2147483649" r:id="R3f19ba02d43f45c1"/>
-    <p:sldLayoutId xmlns:r="http://schemas.openxmlformats.org/officeDocument/2006/relationships" id="2147483650" r:id="R1b23247ecf514397"/>
-    <p:sldLayoutId xmlns:r="http://schemas.openxmlformats.org/officeDocument/2006/relationships" id="2147483651" r:id="R4864ab7270d540e7"/>
-    <p:sldLayoutId xmlns:r="http://schemas.openxmlformats.org/officeDocument/2006/relationships" id="2147483652" r:id="R78b8288b99b94160"/>
-    <p:sldLayoutId xmlns:r="http://schemas.openxmlformats.org/officeDocument/2006/relationships" id="2147483653" r:id="Ra4265248478e4ff6"/>
-    <p:sldLayoutId xmlns:r="http://schemas.openxmlformats.org/officeDocument/2006/relationships" id="2147483654" r:id="Rb1b6722c018345d7"/>
-    <p:sldLayoutId xmlns:r="http://schemas.openxmlformats.org/officeDocument/2006/relationships" id="2147483655" r:id="R7a65e5252ac84431"/>
-    <p:sldLayoutId xmlns:r="http://schemas.openxmlformats.org/officeDocument/2006/relationships" id="2147483656" r:id="Raa3fc7bcca474ba2"/>
-    <p:sldLayoutId xmlns:r="http://schemas.openxmlformats.org/officeDocument/2006/relationships" id="2147483657" r:id="Rcd6d77e1dfba4c18"/>
-    <p:sldLayoutId xmlns:r="http://schemas.openxmlformats.org/officeDocument/2006/relationships" id="2147483658" r:id="Rb601b55f8a7a4df4"/>
-    <p:sldLayoutId xmlns:r="http://schemas.openxmlformats.org/officeDocument/2006/relationships" id="2147483659" r:id="R905dbfe4c26d48c5"/>
+    <p:sldLayoutId xmlns:r="http://schemas.openxmlformats.org/officeDocument/2006/relationships" id="2147483649" r:id="Rdba0166dbcfc4f49"/>
+    <p:sldLayoutId xmlns:r="http://schemas.openxmlformats.org/officeDocument/2006/relationships" id="2147483650" r:id="Rbba4a1732d2047cf"/>
+    <p:sldLayoutId xmlns:r="http://schemas.openxmlformats.org/officeDocument/2006/relationships" id="2147483651" r:id="R1cf067dc4cb64522"/>
+    <p:sldLayoutId xmlns:r="http://schemas.openxmlformats.org/officeDocument/2006/relationships" id="2147483652" r:id="R4da09e6a2c574f3a"/>
+    <p:sldLayoutId xmlns:r="http://schemas.openxmlformats.org/officeDocument/2006/relationships" id="2147483653" r:id="R299b7cc0fd334736"/>
+    <p:sldLayoutId xmlns:r="http://schemas.openxmlformats.org/officeDocument/2006/relationships" id="2147483654" r:id="R954ae6252efa4ba1"/>
+    <p:sldLayoutId xmlns:r="http://schemas.openxmlformats.org/officeDocument/2006/relationships" id="2147483655" r:id="R79a6669e188743d8"/>
+    <p:sldLayoutId xmlns:r="http://schemas.openxmlformats.org/officeDocument/2006/relationships" id="2147483656" r:id="Rb7435ede12fa4651"/>
+    <p:sldLayoutId xmlns:r="http://schemas.openxmlformats.org/officeDocument/2006/relationships" id="2147483657" r:id="R5f2a5c94bd5d487a"/>
+    <p:sldLayoutId xmlns:r="http://schemas.openxmlformats.org/officeDocument/2006/relationships" id="2147483658" r:id="Re19c153c492c4137"/>
+    <p:sldLayoutId xmlns:r="http://schemas.openxmlformats.org/officeDocument/2006/relationships" id="2147483659" r:id="R6ad023341ae141f1"/>
   </p:sldLayoutIdLst>
   <p:hf hdr="0" ftr="0" dt="0"/>
   <p:txStyles>
